--- a/презентация/Тілашар-защита.pptx
+++ b/презентация/Тілашар-защита.pptx
@@ -520,12 +520,18 @@
           </a:p>
           <a:p>
             <a:r>
-              <a:t>для изучения казахского языка — «Тілашар». Оно рассчитано на учеников</a:t>
-            </a:r>
-          </a:p>
-          <a:p>
-            <a:r>
-              <a:t>с 5 по 11 класс.</a:t>
+              <a:t>для изучения грамматики казахского языка — «Тілашар».</a:t>
+            </a:r>
+          </a:p>
+          <a:p/>
+          <a:p>
+            <a:r>
+              <a:t>Эта версия сделана по заданию моего учителя казахского языка: она дала</a:t>
+            </a:r>
+          </a:p>
+          <a:p>
+            <a:r>
+              <a:t>темы и образец заданий — сначала диалог, потом правило, потом задание.</a:t>
             </a:r>
           </a:p>
           <a:p/>
@@ -633,7 +639,12 @@
           </a:p>
           <a:p>
             <a:r>
-              <a:t>содержание уроков, проверка и все решения.</a:t>
+              <a:t>проверка и все решения. Тексты пяти заданий написала учитель, остальные</a:t>
+            </a:r>
+          </a:p>
+          <a:p>
+            <a:r>
+              <a:t>десять составлены по её образцу и сверены с учебником.</a:t>
             </a:r>
           </a:p>
         </p:txBody>
@@ -703,39 +714,23 @@
           <a:lstStyle/>
           <a:p>
             <a:r>
-              <a:t>Не говорить «Duolingo плохой». Говорить: он рассчитан на языки с большой</a:t>
-            </a:r>
-          </a:p>
-          <a:p>
-            <a:r>
-              <a:t>аудиторией, и это нормально. Место для казахского осталось пустым — его</a:t>
-            </a:r>
-          </a:p>
-          <a:p>
-            <a:r>
-              <a:t>я и попробовал занять.</a:t>
+              <a:t>Не говорить «учебник плохой». Говорить: учебник и учитель дают правило,</a:t>
+            </a:r>
+          </a:p>
+          <a:p>
+            <a:r>
+              <a:t>а приложение помогает закрепить его сразу, пока тема свежая.</a:t>
             </a:r>
           </a:p>
           <a:p/>
           <a:p>
             <a:r>
-              <a:t>Главная мысль слайда: приложение должно усилить интерес к языку и дать</a:t>
-            </a:r>
-          </a:p>
-          <a:p>
-            <a:r>
-              <a:t>больше практики, а не заменить учителя.</a:t>
-            </a:r>
-          </a:p>
-          <a:p/>
-          <a:p>
-            <a:r>
-              <a:t>Список курсов я проверил на их сайте и поставил дату. Если жюри захочет —</a:t>
-            </a:r>
-          </a:p>
-          <a:p>
-            <a:r>
-              <a:t>можно открыть сайт прямо сейчас.</a:t>
+              <a:t>Главная мысль слайда: приложение не заменяет учителя. Оно повторяет его</a:t>
+            </a:r>
+          </a:p>
+          <a:p>
+            <a:r>
+              <a:t>тему и его порядок урока — диалог, правило, задание.</a:t>
             </a:r>
           </a:p>
         </p:txBody>
@@ -805,28 +800,33 @@
           <a:lstStyle/>
           <a:p>
             <a:r>
-              <a:t>Не перечислять все пять — назвать «Учиться» и «Практику», остальное видно</a:t>
-            </a:r>
-          </a:p>
-          <a:p>
-            <a:r>
-              <a:t>на слайде.</a:t>
+              <a:t>Главное на этом слайде — порядок: диалог, правило, задание. Он такой же,</a:t>
+            </a:r>
+          </a:p>
+          <a:p>
+            <a:r>
+              <a:t>как в первой версии, которая победила на школьной олимпиаде.</a:t>
             </a:r>
           </a:p>
           <a:p/>
           <a:p>
             <a:r>
-              <a:t>Смысл: это не список уроков, а курс на весь учебный год с тремя уровнями —</a:t>
-            </a:r>
-          </a:p>
-          <a:p>
-            <a:r>
-              <a:t>5–7, 7–9 и 9–11 класс. Уровень подсказывает, откуда начать, но ничего</a:t>
-            </a:r>
-          </a:p>
-          <a:p>
-            <a:r>
-              <a:t>не запирает: перейти можно в одно касание.</a:t>
+              <a:t>Про цифры внизу. Пять заданий написала учитель, я перенёс их дословно.</a:t>
+            </a:r>
+          </a:p>
+          <a:p>
+            <a:r>
+              <a:t>При сверке с учебником в них нашлось девять мест, которые нужно было</a:t>
+            </a:r>
+          </a:p>
+          <a:p>
+            <a:r>
+              <a:t>поправить, — каждое исправление записано вместе с источником и отправлено</a:t>
+            </a:r>
+          </a:p>
+          <a:p>
+            <a:r>
+              <a:t>учителю. Ещё десять заданий по остальным темам составлены по её образцу.</a:t>
             </a:r>
           </a:p>
         </p:txBody>
@@ -912,28 +912,23 @@
           </a:p>
           <a:p>
             <a:r>
-              <a:t>результат и найти причину, если что-то не работает. В первой версии такой</a:t>
-            </a:r>
-          </a:p>
-          <a:p>
-            <a:r>
-              <a:t>проверки не было, и часть задуманного просто не работала. Поэтому во второй</a:t>
-            </a:r>
-          </a:p>
-          <a:p>
-            <a:r>
-              <a:t>версии приложение проверяет себя само при каждом изменении.</a:t>
+              <a:t>результат и найти причину, если что-то не работает. Поэтому приложение</a:t>
+            </a:r>
+          </a:p>
+          <a:p>
+            <a:r>
+              <a:t>проверяет себя само при каждом изменении — в том числе сверяет текст</a:t>
+            </a:r>
+          </a:p>
+          <a:p>
+            <a:r>
+              <a:t>учителя с её документом слово в слово, чтобы ничего не исказилось.</a:t>
             </a:r>
           </a:p>
           <a:p/>
           <a:p>
             <a:r>
-              <a:t>Про деньги: все сервисы бесплатные. Это важно — значит, повторить может</a:t>
-            </a:r>
-          </a:p>
-          <a:p>
-            <a:r>
-              <a:t>любой школьник.</a:t>
+              <a:t>Про деньги: все сервисы бесплатные. Значит, повторить может любой школьник.</a:t>
             </a:r>
           </a:p>
         </p:txBody>
@@ -1003,7 +998,7 @@
           <a:lstStyle/>
           <a:p>
             <a:r>
-              <a:t>Это ядро доклада. Не читать по пунктам — рассказать про первый и третий,</a:t>
+              <a:t>Это ядро доклада. Не читать по пунктам — рассказать про второй и третий,</a:t>
             </a:r>
           </a:p>
           <a:p>
@@ -1014,33 +1009,33 @@
           <a:p/>
           <a:p>
             <a:r>
-              <a:t>Про первый сделать паузу: в казахском есть буквы, которых физически нет</a:t>
-            </a:r>
-          </a:p>
-          <a:p>
-            <a:r>
-              <a:t>на русской клавиатуре. Обычный тренажёр сравнивает ответ буква в букву,</a:t>
-            </a:r>
-          </a:p>
-          <a:p>
-            <a:r>
-              <a:t>и ученик получает «неверно» за правильный ответ. Именно из-за этого первую</a:t>
-            </a:r>
-          </a:p>
-          <a:p>
-            <a:r>
-              <a:t>версию бросали.</a:t>
+              <a:t>Про второй: учитель просила, чтобы персонаж двигался или говорил. Теперь</a:t>
+            </a:r>
+          </a:p>
+          <a:p>
+            <a:r>
+              <a:t>Айша и учитель произносят каждую реплику казахским голосом, а пока голос</a:t>
+            </a:r>
+          </a:p>
+          <a:p>
+            <a:r>
+              <a:t>звучит, персонаж покачивается.</a:t>
             </a:r>
           </a:p>
           <a:p/>
           <a:p>
             <a:r>
-              <a:t>Про третий: приложение само помнит, что начинает забываться, и возвращает</a:t>
-            </a:r>
-          </a:p>
-          <a:p>
-            <a:r>
-              <a:t>это задание. Ученику не нужно решать, что повторять.</a:t>
+              <a:t>Про третий: в задании, где нужно отметить несколько ответов, нельзя</a:t>
+            </a:r>
+          </a:p>
+          <a:p>
+            <a:r>
+              <a:t>просто нажать всё подряд. Засчитывается только точный набор: пропустил</a:t>
+            </a:r>
+          </a:p>
+          <a:p>
+            <a:r>
+              <a:t>верный вариант или отметил лишний — ошибка.</a:t>
             </a:r>
           </a:p>
         </p:txBody>
@@ -1115,7 +1110,7 @@
           </a:p>
           <a:p>
             <a:r>
-              <a:t>выбрать короткий урок, проверить, что телефон заряжен.</a:t>
+              <a:t>проверить звук, проверить, что телефон заряжен.</a:t>
             </a:r>
           </a:p>
           <a:p/>
@@ -1126,38 +1121,33 @@
           </a:p>
           <a:p>
             <a:r>
-              <a:t>1. Дорожку уроков — видно, где я сейчас.</a:t>
-            </a:r>
-          </a:p>
-          <a:p>
-            <a:r>
-              <a:t>2. Открыть урок, дойти до задания.</a:t>
-            </a:r>
-          </a:p>
-          <a:p>
-            <a:r>
-              <a:t>3. Набрать ответ РУССКИМИ буквами — например «аке» вместо «әке».</a:t>
-            </a:r>
-          </a:p>
-          <a:p>
-            <a:r>
-              <a:t>   Приложение ответит «Грамматика верна» и покажет правильное написание.</a:t>
-            </a:r>
-          </a:p>
-          <a:p>
-            <a:r>
-              <a:t>   Это и есть главное.</a:t>
-            </a:r>
-          </a:p>
-          <a:p>
-            <a:r>
-              <a:t>4. Показать ряд казахских букв под полем.</a:t>
+              <a:t>1. Список тем — они в том порядке, в каком их дала учитель.</a:t>
+            </a:r>
+          </a:p>
+          <a:p>
+            <a:r>
+              <a:t>2. Открыть «Сын есім», нажать «послушать» у реплики Айши и учителя.</a:t>
+            </a:r>
+          </a:p>
+          <a:p>
+            <a:r>
+              <a:t>3. Перейти к правилу, потом к заданию, выбрать ответ «сары».</a:t>
+            </a:r>
+          </a:p>
+          <a:p>
+            <a:r>
+              <a:t>4. Во втором задании отметить «үлкен» и «биік» и нажать «Тексеру».</a:t>
+            </a:r>
+          </a:p>
+          <a:p>
+            <a:r>
+              <a:t>5. Нажать «Рус» — показать, что под казахским текстом появился перевод.</a:t>
             </a:r>
           </a:p>
           <a:p/>
           <a:p>
             <a:r>
-              <a:t>Запасной вариант, если проектор не покажет телефон: слайды с картинками.</a:t>
+              <a:t>Запасной вариант, если проектор не покажет телефон: ролик из комплекта.</a:t>
             </a:r>
           </a:p>
         </p:txBody>
@@ -1233,33 +1223,23 @@
           <a:p/>
           <a:p>
             <a:r>
-              <a:t>Порядок такой. Сначала коротко: тексты проверил учитель, ребята уже</a:t>
-            </a:r>
-          </a:p>
-          <a:p>
-            <a:r>
-              <a:t>позанимались, приложение работает. Потом — куда это может вырасти.</a:t>
-            </a:r>
-          </a:p>
-          <a:p>
-            <a:r>
-              <a:t>И в конце прямая просьба: дайте классы для апробации и методистов.</a:t>
+              <a:t>Порядок такой. Сначала коротко, что уже сделано. Потом — куда это может</a:t>
+            </a:r>
+          </a:p>
+          <a:p>
+            <a:r>
+              <a:t>вырасти. И в конце прямая просьба: дайте классы для апробации и методистов.</a:t>
             </a:r>
           </a:p>
           <a:p/>
           <a:p>
             <a:r>
-              <a:t>Главная мысль на прощание: казахский не сложнее других языков. Ученику</a:t>
-            </a:r>
-          </a:p>
-          <a:p>
-            <a:r>
-              <a:t>мешало то, что он не мог нажать нужную букву. Это я убрал — дальше нужно,</a:t>
-            </a:r>
-          </a:p>
-          <a:p>
-            <a:r>
-              <a:t>чтобы приложением пользовалась не одна школа.</a:t>
+              <a:t>Главная мысль на прощание: учитель даёт тему, а приложение помогает</a:t>
+            </a:r>
+          </a:p>
+          <a:p>
+            <a:r>
+              <a:t>закрепить её сразу — дома, в дороге, без интернета.</a:t>
             </a:r>
           </a:p>
           <a:p/>
@@ -1276,17 +1256,17 @@
           </a:p>
           <a:p>
             <a:r>
-              <a:t>Убедиться, что учитель действительно посмотрел тексты, и вписать его ФИО</a:t>
-            </a:r>
-          </a:p>
-          <a:p>
-            <a:r>
-              <a:t>в тексты.py (TEACHER_RU / TEACHER_KZ). Раздать ссылку одноклассникам</a:t>
-            </a:r>
-          </a:p>
-          <a:p>
-            <a:r>
-              <a:t>и вписать их число (TESTERS) — живое число убеждает сильнее слов.</a:t>
+              <a:t>Когда учитель посмотрит тексты, вписать её ФИО в тексты.py</a:t>
+            </a:r>
+          </a:p>
+          <a:p>
+            <a:r>
+              <a:t>(TEACHER_RU / TEACHER_KZ). Раздать ссылку одноклассникам и вписать</a:t>
+            </a:r>
+          </a:p>
+          <a:p>
+            <a:r>
+              <a:t>их число (TESTERS) — живое число убеждает сильнее слов.</a:t>
             </a:r>
           </a:p>
           <a:p/>
@@ -1303,86 +1283,66 @@
           </a:p>
           <a:p>
             <a:r>
-              <a:t>   Код помогала писать нейросеть. Я ставил задачу, проверял результат</a:t>
-            </a:r>
-          </a:p>
-          <a:p>
-            <a:r>
-              <a:t>   и искал причину, если что-то не работало. Содержание уроков и все</a:t>
-            </a:r>
-          </a:p>
-          <a:p>
-            <a:r>
-              <a:t>   решения — мои.</a:t>
+              <a:t>   Нейросеть писала код. Я ставил задачу, проверял результат и решал,</a:t>
+            </a:r>
+          </a:p>
+          <a:p>
+            <a:r>
+              <a:t>   что оставить, а что убрать.</a:t>
             </a:r>
           </a:p>
           <a:p/>
           <a:p>
             <a:r>
-              <a:t>2. «Чем это отличается от прошлогодней работы?»</a:t>
-            </a:r>
-          </a:p>
-          <a:p>
-            <a:r>
-              <a:t>   Тогда я показывал замысел, и он победил. Сейчас показываю работающее</a:t>
-            </a:r>
-          </a:p>
-          <a:p>
-            <a:r>
-              <a:t>   приложение, которое проверил учитель и попробовали одноклассники.</a:t>
+              <a:t>2. «Кто проверял казахский текст?»</a:t>
+            </a:r>
+          </a:p>
+          <a:p>
+            <a:r>
+              <a:t>   Пять заданий написала учитель. Остальные составлены по её образцу,</a:t>
+            </a:r>
+          </a:p>
+          <a:p>
+            <a:r>
+              <a:t>   сверены с учебником «Бәйшешек» и отправлены ей на проверку.</a:t>
             </a:r>
           </a:p>
           <a:p/>
           <a:p>
             <a:r>
-              <a:t>3. «Кто проверял казахский текст?»</a:t>
-            </a:r>
-          </a:p>
-          <a:p>
-            <a:r>
-              <a:t>   Учитель казахского языка. Тексты выгружаются из приложения одним</a:t>
-            </a:r>
-          </a:p>
-          <a:p>
-            <a:r>
-              <a:t>   файлом — так проверять удобно, и так же будут проверяться новые уроки.</a:t>
+              <a:t>3. «Откуда картинки?»</a:t>
+            </a:r>
+          </a:p>
+          <a:p>
+            <a:r>
+              <a:t>   Персонажи нарисованы нейросетью специально для приложения.</a:t>
             </a:r>
           </a:p>
           <a:p/>
           <a:p>
             <a:r>
-              <a:t>4. «Результаты апробации есть?»</a:t>
-            </a:r>
-          </a:p>
-          <a:p>
-            <a:r>
-              <a:t>   Одноклассники позанимались и сказали, что мешает — это я исправил.</a:t>
-            </a:r>
-          </a:p>
-          <a:p>
-            <a:r>
-              <a:t>   Настоящая апробация на классе с цифрами — следующий шаг, сбор данных</a:t>
-            </a:r>
-          </a:p>
-          <a:p>
-            <a:r>
-              <a:t>   в приложение уже встроен. Придумывать проценты я не стал.</a:t>
+              <a:t>4. «Почему всего семь тем?»</a:t>
+            </a:r>
+          </a:p>
+          <a:p>
+            <a:r>
+              <a:t>   Это темы, которые дала учитель. Добавить новую тему просто —</a:t>
+            </a:r>
+          </a:p>
+          <a:p>
+            <a:r>
+              <a:t>   это первый пункт плана развития.</a:t>
             </a:r>
           </a:p>
           <a:p/>
           <a:p>
             <a:r>
-              <a:t>5. «Приложение платное?»</a:t>
-            </a:r>
-          </a:p>
-          <a:p>
-            <a:r>
-              <a:t>   Нет. Открывается по ссылке, работает без интернета, ставится на телефон.</a:t>
-            </a:r>
-          </a:p>
-          <a:p>
-            <a:r>
-              <a:t>   Все сервисы, на которых оно сделано, тоже бесплатные.</a:t>
+              <a:t>5. «Работает без интернета?»</a:t>
+            </a:r>
+          </a:p>
+          <a:p>
+            <a:r>
+              <a:t>   Да. Можно включить на телефоне режим полёта и показать.</a:t>
             </a:r>
           </a:p>
           <a:p/>
@@ -8539,8 +8499,8 @@
         </p:nvSpPr>
         <p:spPr>
           <a:xfrm>
-            <a:off x="749808" y="3224540"/>
-            <a:ext cx="10692079" cy="1030102"/>
+            <a:off x="749808" y="3242157"/>
+            <a:ext cx="10692079" cy="873747"/>
           </a:xfrm>
           <a:prstGeom prst="rect">
             <a:avLst/>
@@ -8555,11 +8515,11 @@
           <a:p>
             <a:pPr algn="l">
               <a:lnSpc>
-                <a:spcPts val="5712"/>
-              </a:lnSpc>
-            </a:pPr>
-            <a:r>
-              <a:rPr sz="5600" spc="-157">
+                <a:spcPts val="4845"/>
+              </a:lnSpc>
+            </a:pPr>
+            <a:r>
+              <a:rPr sz="4750" spc="-133">
                 <a:solidFill>
                   <a:srgbClr val="EEEBE5"/>
                 </a:solidFill>
@@ -8567,7 +8527,7 @@
                 <a:cs typeface="GQ Text Bold"/>
                 <a:ea typeface="GQ Text Bold"/>
               </a:rPr>
-              <a:t>казахский шаг за шагом</a:t>
+              <a:t>казахская грамматика в три шага</a:t>
             </a:r>
           </a:p>
         </p:txBody>
@@ -8580,8 +8540,8 @@
         </p:nvSpPr>
         <p:spPr>
           <a:xfrm>
-            <a:off x="749808" y="4297680"/>
-            <a:ext cx="7484455" cy="645414"/>
+            <a:off x="749808" y="4187570"/>
+            <a:ext cx="7484455" cy="912114"/>
           </a:xfrm>
           <a:prstGeom prst="rect">
             <a:avLst/>
@@ -8608,7 +8568,7 @@
                 <a:cs typeface="GQ Text"/>
                 <a:ea typeface="GQ Text"/>
               </a:rPr>
-              <a:t>Приложение для учеников 5–11 классов, которые говорят по-русски и учат</a:t>
+              <a:t>Приложение по заданию учителя казахского языка: диалог, правило,</a:t>
             </a:r>
           </a:p>
           <a:p>
@@ -8626,7 +8586,25 @@
                 <a:cs typeface="GQ Text"/>
                 <a:ea typeface="GQ Text"/>
               </a:rPr>
-              <a:t>казахский язык. Бесплатное, открывается по ссылке.</a:t>
+              <a:t>задание. Для учеников школ с русским языком обучения. Бесплатное,</a:t>
+            </a:r>
+          </a:p>
+          <a:p>
+            <a:pPr algn="l">
+              <a:lnSpc>
+                <a:spcPts val="2100"/>
+              </a:lnSpc>
+            </a:pPr>
+            <a:r>
+              <a:rPr sz="1450">
+                <a:solidFill>
+                  <a:srgbClr val="B6BCC4"/>
+                </a:solidFill>
+                <a:latin typeface="GQ Text"/>
+                <a:cs typeface="GQ Text"/>
+                <a:ea typeface="GQ Text"/>
+              </a:rPr>
+              <a:t>открывается по ссылке.</a:t>
             </a:r>
           </a:p>
         </p:txBody>
@@ -8697,7 +8675,7 @@
                 <a:cs typeface="GQ Text Bold"/>
                 <a:ea typeface="GQ Text Bold"/>
               </a:rPr>
-              <a:t>26</a:t>
+              <a:t>7</a:t>
             </a:r>
           </a:p>
         </p:txBody>
@@ -8738,7 +8716,7 @@
                 <a:cs typeface="IBM Plex Mono Medium"/>
                 <a:ea typeface="IBM Plex Mono Medium"/>
               </a:rPr>
-              <a:t>УРОКОВ</a:t>
+              <a:t>ТЕМ</a:t>
             </a:r>
           </a:p>
         </p:txBody>
@@ -8779,7 +8757,7 @@
                 <a:cs typeface="GQ Text Bold"/>
                 <a:ea typeface="GQ Text Bold"/>
               </a:rPr>
-              <a:t>225</a:t>
+              <a:t>15</a:t>
             </a:r>
           </a:p>
         </p:txBody>
@@ -8861,7 +8839,7 @@
                 <a:cs typeface="GQ Text Bold"/>
                 <a:ea typeface="GQ Text Bold"/>
               </a:rPr>
-              <a:t>7</a:t>
+              <a:t>47</a:t>
             </a:r>
           </a:p>
         </p:txBody>
@@ -8902,7 +8880,7 @@
                 <a:cs typeface="IBM Plex Mono Medium"/>
                 <a:ea typeface="IBM Plex Mono Medium"/>
               </a:rPr>
-              <a:t>ТИПОВ УПРАЖНЕНИЙ</a:t>
+              <a:t>ЗАПИСЕЙ ОЗВУЧКИ</a:t>
             </a:r>
           </a:p>
         </p:txBody>
@@ -8943,7 +8921,7 @@
                 <a:cs typeface="GQ Text Bold"/>
                 <a:ea typeface="GQ Text Bold"/>
               </a:rPr>
-              <a:t>5–11</a:t>
+              <a:t>3</a:t>
             </a:r>
           </a:p>
         </p:txBody>
@@ -8984,7 +8962,7 @@
                 <a:cs typeface="IBM Plex Mono Medium"/>
                 <a:ea typeface="IBM Plex Mono Medium"/>
               </a:rPr>
-              <a:t>КЛАССЫ</a:t>
+              <a:t>ШАГА В КАЖДОМ ЗАДАНИИ</a:t>
             </a:r>
           </a:p>
         </p:txBody>
@@ -9973,7 +9951,7 @@
                 <a:cs typeface="GQ Text"/>
                 <a:ea typeface="GQ Text"/>
               </a:rPr>
-              <a:t>26 уроков и 225 заданий</a:t>
+              <a:t>7 тем и 15 заданий</a:t>
             </a:r>
           </a:p>
         </p:txBody>
@@ -10299,7 +10277,7 @@
                 <a:cs typeface="GQ Text"/>
                 <a:ea typeface="GQ Text"/>
               </a:rPr>
-              <a:t>Эта — вторая,</a:t>
+              <a:t>Третья — по заданию</a:t>
             </a:r>
           </a:p>
           <a:p>
@@ -10317,7 +10295,7 @@
                 <a:cs typeface="GQ Text"/>
                 <a:ea typeface="GQ Text"/>
               </a:rPr>
-              <a:t>переработанная</a:t>
+              <a:t>учителя</a:t>
             </a:r>
           </a:p>
         </p:txBody>
@@ -10643,7 +10621,7 @@
                 <a:cs typeface="GQ Text"/>
                 <a:ea typeface="GQ Text"/>
               </a:rPr>
-              <a:t>Ученикам 5–11 классов</a:t>
+              <a:t>На телефоне и компьютере,</a:t>
             </a:r>
           </a:p>
           <a:p>
@@ -10661,7 +10639,7 @@
                 <a:cs typeface="GQ Text"/>
                 <a:ea typeface="GQ Text"/>
               </a:rPr>
-              <a:t>любой школы</a:t>
+              <a:t>без интернета</a:t>
             </a:r>
           </a:p>
         </p:txBody>
@@ -10794,7 +10772,7 @@
         <p:spPr>
           <a:xfrm>
             <a:off x="6196431" y="2964688"/>
-            <a:ext cx="5245455" cy="1463039"/>
+            <a:ext cx="5245455" cy="1234439"/>
           </a:xfrm>
           <a:prstGeom prst="rect">
             <a:avLst/>
@@ -11027,7 +11005,7 @@
                 <a:cs typeface="GQ Text Bold"/>
                 <a:ea typeface="GQ Text Bold"/>
               </a:rPr>
-              <a:t>Казахский учат в каждой школе, а удобно</a:t>
+              <a:t>Грамматику учат в каждой школе, а</a:t>
             </a:r>
           </a:p>
           <a:p>
@@ -11045,7 +11023,7 @@
                 <a:cs typeface="GQ Text Bold"/>
                 <a:ea typeface="GQ Text Bold"/>
               </a:rPr>
-              <a:t>тренироваться негде</a:t>
+              <a:t>закрепить правило сразу негде</a:t>
             </a:r>
           </a:p>
         </p:txBody>
@@ -11086,7 +11064,7 @@
                 <a:cs typeface="GQ Text"/>
                 <a:ea typeface="GQ Text"/>
               </a:rPr>
-              <a:t>Казахский — государственный язык, обязательный предмет во всех школах страны, в том числе там, где обучение</a:t>
+              <a:t>Казахский — государственный язык и обязательный предмет во всех школах страны, в том числе там, где</a:t>
             </a:r>
           </a:p>
           <a:p>
@@ -11104,7 +11082,7 @@
                 <a:cs typeface="GQ Text"/>
                 <a:ea typeface="GQ Text"/>
               </a:rPr>
-              <a:t>идёт на русском.</a:t>
+              <a:t>обучение идёт на русском.</a:t>
             </a:r>
           </a:p>
         </p:txBody>
@@ -11175,7 +11153,7 @@
                 <a:cs typeface="GQ Text SemiBold"/>
                 <a:ea typeface="GQ Text SemiBold"/>
               </a:rPr>
-              <a:t>Язык даётся не объёмом, а повторением: десять минут</a:t>
+              <a:t>В учебнике правило стоит отдельно от примера, а верно</a:t>
             </a:r>
           </a:p>
           <a:p>
@@ -11193,7 +11171,7 @@
                 <a:cs typeface="GQ Text SemiBold"/>
                 <a:ea typeface="GQ Text SemiBold"/>
               </a:rPr>
-              <a:t>каждый день дают больше, чем два часа раз в неделю.</a:t>
+              <a:t>ли ответил, ученик узнаёт только после проверки</a:t>
             </a:r>
           </a:p>
           <a:p>
@@ -11211,7 +11189,7 @@
                 <a:cs typeface="GQ Text SemiBold"/>
                 <a:ea typeface="GQ Text SemiBold"/>
               </a:rPr>
-              <a:t>Телефон для этого подходит идеально — он всегда с</a:t>
+              <a:t>учителем. До следующего урока ошибка успевает</a:t>
             </a:r>
           </a:p>
           <a:p>
@@ -11229,7 +11207,7 @@
                 <a:cs typeface="GQ Text SemiBold"/>
                 <a:ea typeface="GQ Text SemiBold"/>
               </a:rPr>
-              <a:t>собой.</a:t>
+              <a:t>закрепиться.</a:t>
             </a:r>
           </a:p>
         </p:txBody>
@@ -11243,7 +11221,7 @@
         <p:spPr>
           <a:xfrm>
             <a:off x="6452463" y="3202432"/>
-            <a:ext cx="4733391" cy="1010412"/>
+            <a:ext cx="4733391" cy="781812"/>
           </a:xfrm>
           <a:prstGeom prst="rect">
             <a:avLst/>
@@ -11270,7 +11248,7 @@
                 <a:cs typeface="GQ Text"/>
                 <a:ea typeface="GQ Text"/>
               </a:rPr>
-              <a:t>Но тренажёров, где объяснение по-русски, а учат</a:t>
+              <a:t>В приложении правило сразу показано в коротком</a:t>
             </a:r>
           </a:p>
           <a:p>
@@ -11288,7 +11266,7 @@
                 <a:cs typeface="GQ Text"/>
                 <a:ea typeface="GQ Text"/>
               </a:rPr>
-              <a:t>казахскому, почти нет. На duolingo.com говорящим</a:t>
+              <a:t>диалоге, а ответ проверяется в ту же секунду: при ошибке</a:t>
             </a:r>
           </a:p>
           <a:p>
@@ -11306,17 +11284,40 @@
                 <a:cs typeface="GQ Text"/>
                 <a:ea typeface="GQ Text"/>
               </a:rPr>
-              <a:t>по-русски доступно девять языков — казахского среди них</a:t>
-            </a:r>
-          </a:p>
-          <a:p>
-            <a:pPr algn="l">
-              <a:lnSpc>
-                <a:spcPts val="1800"/>
-              </a:lnSpc>
-            </a:pPr>
-            <a:r>
-              <a:rPr sz="1250">
+              <a:t>ученик видит правильный вариант.</a:t>
+            </a:r>
+          </a:p>
+        </p:txBody>
+      </p:sp>
+      <p:sp>
+        <p:nvSpPr>
+          <p:cNvPr id="14" name="TextBox 13"/>
+          <p:cNvSpPr txBox="1"/>
+          <p:nvPr/>
+        </p:nvSpPr>
+        <p:spPr>
+          <a:xfrm>
+            <a:off x="749808" y="6285788"/>
+            <a:ext cx="10692079" cy="209194"/>
+          </a:xfrm>
+          <a:prstGeom prst="rect">
+            <a:avLst/>
+          </a:prstGeom>
+          <a:noFill/>
+        </p:spPr>
+        <p:txBody>
+          <a:bodyPr wrap="none" lIns="0" rIns="0" tIns="0" bIns="0" anchor="t">
+            <a:spAutoFit/>
+          </a:bodyPr>
+          <a:lstStyle/>
+          <a:p>
+            <a:pPr algn="l">
+              <a:lnSpc>
+                <a:spcPts val="1160"/>
+              </a:lnSpc>
+            </a:pPr>
+            <a:r>
+              <a:rPr sz="850">
                 <a:solidFill>
                   <a:srgbClr val="535C66"/>
                 </a:solidFill>
@@ -11324,48 +11325,7 @@
                 <a:cs typeface="GQ Text"/>
                 <a:ea typeface="GQ Text"/>
               </a:rPr>
-              <a:t>нет. Остаются учебник и тетрадь.</a:t>
-            </a:r>
-          </a:p>
-        </p:txBody>
-      </p:sp>
-      <p:sp>
-        <p:nvSpPr>
-          <p:cNvPr id="14" name="TextBox 13"/>
-          <p:cNvSpPr txBox="1"/>
-          <p:nvPr/>
-        </p:nvSpPr>
-        <p:spPr>
-          <a:xfrm>
-            <a:off x="749808" y="6285788"/>
-            <a:ext cx="10692079" cy="209194"/>
-          </a:xfrm>
-          <a:prstGeom prst="rect">
-            <a:avLst/>
-          </a:prstGeom>
-          <a:noFill/>
-        </p:spPr>
-        <p:txBody>
-          <a:bodyPr wrap="none" lIns="0" rIns="0" tIns="0" bIns="0" anchor="t">
-            <a:spAutoFit/>
-          </a:bodyPr>
-          <a:lstStyle/>
-          <a:p>
-            <a:pPr algn="l">
-              <a:lnSpc>
-                <a:spcPts val="1160"/>
-              </a:lnSpc>
-            </a:pPr>
-            <a:r>
-              <a:rPr sz="850">
-                <a:solidFill>
-                  <a:srgbClr val="535C66"/>
-                </a:solidFill>
-                <a:latin typeface="GQ Text"/>
-                <a:cs typeface="GQ Text"/>
-                <a:ea typeface="GQ Text"/>
-              </a:rPr>
-              <a:t>Источник: duolingo.com/courses, раздел «Курсы для тех, кто знает русский». Проверено 25.08.2026.</a:t>
+              <a:t>Темы и порядок урока — по заданию учителя казахского языка. Правила сверены с учебником «Бәйшешек» для 5 и 6 классов.</a:t>
             </a:r>
           </a:p>
         </p:txBody>
@@ -11538,8 +11498,8 @@
         </p:nvSpPr>
         <p:spPr>
           <a:xfrm>
-            <a:off x="749808" y="796290"/>
-            <a:ext cx="10692079" cy="723614"/>
+            <a:off x="749808" y="790854"/>
+            <a:ext cx="10692079" cy="771855"/>
           </a:xfrm>
           <a:prstGeom prst="rect">
             <a:avLst/>
@@ -11554,11 +11514,11 @@
           <a:p>
             <a:pPr algn="l">
               <a:lnSpc>
-                <a:spcPts val="4012"/>
-              </a:lnSpc>
-            </a:pPr>
-            <a:r>
-              <a:rPr sz="3750" spc="-82">
+                <a:spcPts val="4280"/>
+              </a:lnSpc>
+            </a:pPr>
+            <a:r>
+              <a:rPr sz="4000" spc="-88">
                 <a:solidFill>
                   <a:srgbClr val="EEEBE5"/>
                 </a:solidFill>
@@ -11566,7 +11526,7 @@
                 <a:cs typeface="GQ Text Bold"/>
                 <a:ea typeface="GQ Text Bold"/>
               </a:rPr>
-              <a:t>Пять разделов и понятный экран для каждого</a:t>
+              <a:t>Три экрана и семь тем учителя</a:t>
             </a:r>
           </a:p>
         </p:txBody>
@@ -11579,7 +11539,7 @@
         </p:nvSpPr>
         <p:spPr>
           <a:xfrm>
-            <a:off x="749808" y="1496204"/>
+            <a:off x="749808" y="1530177"/>
             <a:ext cx="9195188" cy="567349"/>
           </a:xfrm>
           <a:prstGeom prst="rect">
@@ -11607,7 +11567,7 @@
                 <a:cs typeface="GQ Text"/>
                 <a:ea typeface="GQ Text"/>
               </a:rPr>
-              <a:t>Ученик открывает приложение и сразу видит, где он остановился и что делать дальше. Разбираться в меню не</a:t>
+              <a:t>Ученик открывает приложение, выбирает тему и проходит её по шагам. Лишних разделов нет — только</a:t>
             </a:r>
           </a:p>
           <a:p>
@@ -11625,7 +11585,7 @@
                 <a:cs typeface="GQ Text"/>
                 <a:ea typeface="GQ Text"/>
               </a:rPr>
-              <a:t>нужно.</a:t>
+              <a:t>грамматика.</a:t>
             </a:r>
           </a:p>
         </p:txBody>
@@ -11638,7 +11598,7 @@
         </p:nvSpPr>
         <p:spPr>
           <a:xfrm>
-            <a:off x="749808" y="2240343"/>
+            <a:off x="749808" y="2274316"/>
             <a:ext cx="10692079" cy="7315"/>
           </a:xfrm>
           <a:prstGeom prst="rect">
@@ -11668,7 +11628,7 @@
         </p:nvSpPr>
         <p:spPr>
           <a:xfrm>
-            <a:off x="749808" y="2514826"/>
+            <a:off x="749808" y="2548798"/>
             <a:ext cx="1962851" cy="323169"/>
           </a:xfrm>
           <a:prstGeom prst="rect">
@@ -11696,7 +11656,7 @@
                 <a:cs typeface="GQ Text Bold"/>
                 <a:ea typeface="GQ Text Bold"/>
               </a:rPr>
-              <a:t>Учиться</a:t>
+              <a:t>Первый экран</a:t>
             </a:r>
           </a:p>
         </p:txBody>
@@ -11709,7 +11669,7 @@
         </p:nvSpPr>
         <p:spPr>
           <a:xfrm>
-            <a:off x="749808" y="2876359"/>
+            <a:off x="749808" y="2910332"/>
             <a:ext cx="1962851" cy="651509"/>
           </a:xfrm>
           <a:prstGeom prst="rect">
@@ -11737,7 +11697,7 @@
                 <a:cs typeface="GQ Text"/>
                 <a:ea typeface="GQ Text"/>
               </a:rPr>
-              <a:t>Дорожка уроков: видно</a:t>
+              <a:t>Айша и учитель, как</a:t>
             </a:r>
           </a:p>
           <a:p>
@@ -11755,7 +11715,7 @@
                 <a:cs typeface="GQ Text"/>
                 <a:ea typeface="GQ Text"/>
               </a:rPr>
-              <a:t>пройденное и следующий</a:t>
+              <a:t>устроено задание, смена</a:t>
             </a:r>
           </a:p>
           <a:p>
@@ -11773,7 +11733,7 @@
                 <a:cs typeface="GQ Text"/>
                 <a:ea typeface="GQ Text"/>
               </a:rPr>
-              <a:t>шаг</a:t>
+              <a:t>языка</a:t>
             </a:r>
           </a:p>
         </p:txBody>
@@ -11786,7 +11746,7 @@
         </p:nvSpPr>
         <p:spPr>
           <a:xfrm>
-            <a:off x="2932115" y="2514826"/>
+            <a:off x="2932115" y="2548798"/>
             <a:ext cx="1962851" cy="323169"/>
           </a:xfrm>
           <a:prstGeom prst="rect">
@@ -11814,7 +11774,7 @@
                 <a:cs typeface="GQ Text Bold"/>
                 <a:ea typeface="GQ Text Bold"/>
               </a:rPr>
-              <a:t>Практика</a:t>
+              <a:t>Темы</a:t>
             </a:r>
           </a:p>
         </p:txBody>
@@ -11827,7 +11787,7 @@
         </p:nvSpPr>
         <p:spPr>
           <a:xfrm>
-            <a:off x="2932115" y="2876359"/>
+            <a:off x="2932115" y="2910332"/>
             <a:ext cx="1962851" cy="651509"/>
           </a:xfrm>
           <a:prstGeom prst="rect">
@@ -11855,7 +11815,7 @@
                 <a:cs typeface="GQ Text"/>
                 <a:ea typeface="GQ Text"/>
               </a:rPr>
-              <a:t>Цель на день, повторение,</a:t>
+              <a:t>Семь тем в порядке листка</a:t>
             </a:r>
           </a:p>
           <a:p>
@@ -11873,7 +11833,7 @@
                 <a:cs typeface="GQ Text"/>
                 <a:ea typeface="GQ Text"/>
               </a:rPr>
-              <a:t>карточки слов, спринт на 60</a:t>
+              <a:t>учителя, отметка</a:t>
             </a:r>
           </a:p>
           <a:p>
@@ -11891,7 +11851,7 @@
                 <a:cs typeface="GQ Text"/>
                 <a:ea typeface="GQ Text"/>
               </a:rPr>
-              <a:t>секунд</a:t>
+              <a:t>пройденных</a:t>
             </a:r>
           </a:p>
         </p:txBody>
@@ -11904,7 +11864,7 @@
         </p:nvSpPr>
         <p:spPr>
           <a:xfrm>
-            <a:off x="5114422" y="2514826"/>
+            <a:off x="5114422" y="2548798"/>
             <a:ext cx="1962851" cy="323169"/>
           </a:xfrm>
           <a:prstGeom prst="rect">
@@ -11932,7 +11892,7 @@
                 <a:cs typeface="GQ Text Bold"/>
                 <a:ea typeface="GQ Text Bold"/>
               </a:rPr>
-              <a:t>Словарь</a:t>
+              <a:t>Диалог</a:t>
             </a:r>
           </a:p>
         </p:txBody>
@@ -11945,8 +11905,8 @@
         </p:nvSpPr>
         <p:spPr>
           <a:xfrm>
-            <a:off x="5114422" y="2876359"/>
-            <a:ext cx="1962851" cy="651509"/>
+            <a:off x="5114422" y="2910332"/>
+            <a:ext cx="1962851" cy="461010"/>
           </a:xfrm>
           <a:prstGeom prst="rect">
             <a:avLst/>
@@ -11973,7 +11933,7 @@
                 <a:cs typeface="GQ Text"/>
                 <a:ea typeface="GQ Text"/>
               </a:rPr>
-              <a:t>162 слова из уроков, поиск</a:t>
+              <a:t>Короткий разговор по теме,</a:t>
             </a:r>
           </a:p>
           <a:p>
@@ -11991,9 +11951,73 @@
                 <a:cs typeface="GQ Text"/>
                 <a:ea typeface="GQ Text"/>
               </a:rPr>
-              <a:t>работает с русской</a:t>
-            </a:r>
-          </a:p>
+              <a:t>каждая реплика озвучена</a:t>
+            </a:r>
+          </a:p>
+        </p:txBody>
+      </p:sp>
+      <p:sp>
+        <p:nvSpPr>
+          <p:cNvPr id="15" name="TextBox 14"/>
+          <p:cNvSpPr txBox="1"/>
+          <p:nvPr/>
+        </p:nvSpPr>
+        <p:spPr>
+          <a:xfrm>
+            <a:off x="7296729" y="2548798"/>
+            <a:ext cx="1962851" cy="323169"/>
+          </a:xfrm>
+          <a:prstGeom prst="rect">
+            <a:avLst/>
+          </a:prstGeom>
+          <a:noFill/>
+        </p:spPr>
+        <p:txBody>
+          <a:bodyPr wrap="none" lIns="0" rIns="0" tIns="0" bIns="0" anchor="t">
+            <a:spAutoFit/>
+          </a:bodyPr>
+          <a:lstStyle/>
+          <a:p>
+            <a:pPr algn="l">
+              <a:lnSpc>
+                <a:spcPts val="1792"/>
+              </a:lnSpc>
+            </a:pPr>
+            <a:r>
+              <a:rPr sz="1600" spc="-24">
+                <a:solidFill>
+                  <a:srgbClr val="EEEBE5"/>
+                </a:solidFill>
+                <a:latin typeface="GQ Text Bold"/>
+                <a:cs typeface="GQ Text Bold"/>
+                <a:ea typeface="GQ Text Bold"/>
+              </a:rPr>
+              <a:t>Правило</a:t>
+            </a:r>
+          </a:p>
+        </p:txBody>
+      </p:sp>
+      <p:sp>
+        <p:nvSpPr>
+          <p:cNvPr id="16" name="TextBox 15"/>
+          <p:cNvSpPr txBox="1"/>
+          <p:nvPr/>
+        </p:nvSpPr>
+        <p:spPr>
+          <a:xfrm>
+            <a:off x="7296729" y="2910332"/>
+            <a:ext cx="1962851" cy="461010"/>
+          </a:xfrm>
+          <a:prstGeom prst="rect">
+            <a:avLst/>
+          </a:prstGeom>
+          <a:noFill/>
+        </p:spPr>
+        <p:txBody>
+          <a:bodyPr wrap="none" lIns="0" rIns="0" tIns="0" bIns="0" anchor="t">
+            <a:spAutoFit/>
+          </a:bodyPr>
+          <a:lstStyle/>
           <a:p>
             <a:pPr algn="l">
               <a:lnSpc>
@@ -12009,20 +12033,38 @@
                 <a:cs typeface="GQ Text"/>
                 <a:ea typeface="GQ Text"/>
               </a:rPr>
-              <a:t>раскладки</a:t>
-            </a:r>
-          </a:p>
-        </p:txBody>
-      </p:sp>
-      <p:sp>
-        <p:nvSpPr>
-          <p:cNvPr id="15" name="TextBox 14"/>
+              <a:t>Правило темы, сверенное с</a:t>
+            </a:r>
+          </a:p>
+          <a:p>
+            <a:pPr algn="l">
+              <a:lnSpc>
+                <a:spcPts val="1500"/>
+              </a:lnSpc>
+            </a:pPr>
+            <a:r>
+              <a:rPr sz="1050">
+                <a:solidFill>
+                  <a:srgbClr val="A6ADB6"/>
+                </a:solidFill>
+                <a:latin typeface="GQ Text"/>
+                <a:cs typeface="GQ Text"/>
+                <a:ea typeface="GQ Text"/>
+              </a:rPr>
+              <a:t>учебником</a:t>
+            </a:r>
+          </a:p>
+        </p:txBody>
+      </p:sp>
+      <p:sp>
+        <p:nvSpPr>
+          <p:cNvPr id="17" name="TextBox 16"/>
           <p:cNvSpPr txBox="1"/>
           <p:nvPr/>
         </p:nvSpPr>
         <p:spPr>
           <a:xfrm>
-            <a:off x="7296729" y="2514826"/>
+            <a:off x="9479036" y="2548798"/>
             <a:ext cx="1962851" cy="323169"/>
           </a:xfrm>
           <a:prstGeom prst="rect">
@@ -12050,20 +12092,20 @@
                 <a:cs typeface="GQ Text Bold"/>
                 <a:ea typeface="GQ Text Bold"/>
               </a:rPr>
-              <a:t>Справка</a:t>
-            </a:r>
-          </a:p>
-        </p:txBody>
-      </p:sp>
-      <p:sp>
-        <p:nvSpPr>
-          <p:cNvPr id="16" name="TextBox 15"/>
+              <a:t>Задание</a:t>
+            </a:r>
+          </a:p>
+        </p:txBody>
+      </p:sp>
+      <p:sp>
+        <p:nvSpPr>
+          <p:cNvPr id="18" name="TextBox 17"/>
           <p:cNvSpPr txBox="1"/>
           <p:nvPr/>
         </p:nvSpPr>
         <p:spPr>
           <a:xfrm>
-            <a:off x="7296729" y="2876359"/>
+            <a:off x="9479036" y="2910332"/>
             <a:ext cx="1962851" cy="461010"/>
           </a:xfrm>
           <a:prstGeom prst="rect">
@@ -12091,7 +12133,7 @@
                 <a:cs typeface="GQ Text"/>
                 <a:ea typeface="GQ Text"/>
               </a:rPr>
-              <a:t>33 правила, 22 темы и живые</a:t>
+              <a:t>Выбор ответа, проверка</a:t>
             </a:r>
           </a:p>
           <a:p>
@@ -12109,21 +12151,51 @@
                 <a:cs typeface="GQ Text"/>
                 <a:ea typeface="GQ Text"/>
               </a:rPr>
-              <a:t>таблицы окончаний</a:t>
-            </a:r>
-          </a:p>
-        </p:txBody>
-      </p:sp>
-      <p:sp>
-        <p:nvSpPr>
-          <p:cNvPr id="17" name="TextBox 16"/>
+              <a:t>сразу, итог темы</a:t>
+            </a:r>
+          </a:p>
+        </p:txBody>
+      </p:sp>
+      <p:sp>
+        <p:nvSpPr>
+          <p:cNvPr id="19" name="Rectangle 18"/>
+          <p:cNvSpPr/>
+          <p:nvPr/>
+        </p:nvSpPr>
+        <p:spPr>
+          <a:xfrm>
+            <a:off x="749808" y="3932936"/>
+            <a:ext cx="10692079" cy="710247"/>
+          </a:xfrm>
+          <a:prstGeom prst="rect">
+            <a:avLst/>
+          </a:prstGeom>
+          <a:solidFill>
+            <a:srgbClr val="0064B9"/>
+          </a:solidFill>
+          <a:ln>
+            <a:noFill/>
+          </a:ln>
+          <a:effectLst/>
+        </p:spPr>
+        <p:txBody>
+          <a:bodyPr rtlCol="0" anchor="ctr" wrap="none"/>
+          <a:lstStyle/>
+          <a:p>
+            <a:pPr algn="ctr"/>
+          </a:p>
+        </p:txBody>
+      </p:sp>
+      <p:sp>
+        <p:nvSpPr>
+          <p:cNvPr id="20" name="TextBox 19"/>
           <p:cNvSpPr txBox="1"/>
           <p:nvPr/>
         </p:nvSpPr>
         <p:spPr>
           <a:xfrm>
-            <a:off x="9479036" y="2514826"/>
-            <a:ext cx="1962851" cy="323169"/>
+            <a:off x="1024127" y="4132021"/>
+            <a:ext cx="10143439" cy="345281"/>
           </a:xfrm>
           <a:prstGeom prst="rect">
             <a:avLst/>
@@ -12138,11 +12210,52 @@
           <a:p>
             <a:pPr algn="l">
               <a:lnSpc>
-                <a:spcPts val="1792"/>
-              </a:lnSpc>
-            </a:pPr>
-            <a:r>
-              <a:rPr sz="1600" spc="-24">
+                <a:spcPts val="1812"/>
+              </a:lnSpc>
+            </a:pPr>
+            <a:r>
+              <a:rPr sz="1250">
+                <a:solidFill>
+                  <a:srgbClr val="FFFFFF"/>
+                </a:solidFill>
+                <a:latin typeface="GQ Text SemiBold"/>
+                <a:cs typeface="GQ Text SemiBold"/>
+                <a:ea typeface="GQ Text SemiBold"/>
+              </a:rPr>
+              <a:t>47 записей озвучки, говорящие персонажи, русский перевод по кнопке и работа без интернета.</a:t>
+            </a:r>
+          </a:p>
+        </p:txBody>
+      </p:sp>
+      <p:sp>
+        <p:nvSpPr>
+          <p:cNvPr id="21" name="TextBox 20"/>
+          <p:cNvSpPr txBox="1"/>
+          <p:nvPr/>
+        </p:nvSpPr>
+        <p:spPr>
+          <a:xfrm>
+            <a:off x="749808" y="5105829"/>
+            <a:ext cx="2383219" cy="600892"/>
+          </a:xfrm>
+          <a:prstGeom prst="rect">
+            <a:avLst/>
+          </a:prstGeom>
+          <a:noFill/>
+        </p:spPr>
+        <p:txBody>
+          <a:bodyPr wrap="none" lIns="0" rIns="0" tIns="0" bIns="0" anchor="t">
+            <a:spAutoFit/>
+          </a:bodyPr>
+          <a:lstStyle/>
+          <a:p>
+            <a:pPr algn="l">
+              <a:lnSpc>
+                <a:spcPts val="3332"/>
+              </a:lnSpc>
+            </a:pPr>
+            <a:r>
+              <a:rPr sz="3400" spc="-102">
                 <a:solidFill>
                   <a:srgbClr val="EEEBE5"/>
                 </a:solidFill>
@@ -12150,21 +12263,21 @@
                 <a:cs typeface="GQ Text Bold"/>
                 <a:ea typeface="GQ Text Bold"/>
               </a:rPr>
-              <a:t>Профиль</a:t>
-            </a:r>
-          </a:p>
-        </p:txBody>
-      </p:sp>
-      <p:sp>
-        <p:nvSpPr>
-          <p:cNvPr id="18" name="TextBox 17"/>
+              <a:t>5</a:t>
+            </a:r>
+          </a:p>
+        </p:txBody>
+      </p:sp>
+      <p:sp>
+        <p:nvSpPr>
+          <p:cNvPr id="22" name="TextBox 21"/>
           <p:cNvSpPr txBox="1"/>
           <p:nvPr/>
         </p:nvSpPr>
         <p:spPr>
           <a:xfrm>
-            <a:off x="9479036" y="2876359"/>
-            <a:ext cx="1962851" cy="651509"/>
+            <a:off x="749808" y="5663755"/>
+            <a:ext cx="2383219" cy="216408"/>
           </a:xfrm>
           <a:prstGeom prst="rect">
             <a:avLst/>
@@ -12179,99 +12292,33 @@
           <a:p>
             <a:pPr algn="l">
               <a:lnSpc>
-                <a:spcPts val="1500"/>
-              </a:lnSpc>
-            </a:pPr>
-            <a:r>
-              <a:rPr sz="1050">
+                <a:spcPts val="1200"/>
+              </a:lnSpc>
+            </a:pPr>
+            <a:r>
+              <a:rPr sz="800" spc="64">
                 <a:solidFill>
                   <a:srgbClr val="A6ADB6"/>
                 </a:solidFill>
-                <a:latin typeface="GQ Text"/>
-                <a:cs typeface="GQ Text"/>
-                <a:ea typeface="GQ Text"/>
-              </a:rPr>
-              <a:t>Статистика, награды и</a:t>
-            </a:r>
-          </a:p>
-          <a:p>
-            <a:pPr algn="l">
-              <a:lnSpc>
-                <a:spcPts val="1500"/>
-              </a:lnSpc>
-            </a:pPr>
-            <a:r>
-              <a:rPr sz="1050">
-                <a:solidFill>
-                  <a:srgbClr val="A6ADB6"/>
-                </a:solidFill>
-                <a:latin typeface="GQ Text"/>
-                <a:cs typeface="GQ Text"/>
-                <a:ea typeface="GQ Text"/>
-              </a:rPr>
-              <a:t>выгрузка результатов</a:t>
-            </a:r>
-          </a:p>
-          <a:p>
-            <a:pPr algn="l">
-              <a:lnSpc>
-                <a:spcPts val="1500"/>
-              </a:lnSpc>
-            </a:pPr>
-            <a:r>
-              <a:rPr sz="1050">
-                <a:solidFill>
-                  <a:srgbClr val="A6ADB6"/>
-                </a:solidFill>
-                <a:latin typeface="GQ Text"/>
-                <a:cs typeface="GQ Text"/>
-                <a:ea typeface="GQ Text"/>
-              </a:rPr>
-              <a:t>таблицей</a:t>
-            </a:r>
-          </a:p>
-        </p:txBody>
-      </p:sp>
-      <p:sp>
-        <p:nvSpPr>
-          <p:cNvPr id="19" name="Rectangle 18"/>
-          <p:cNvSpPr/>
-          <p:nvPr/>
-        </p:nvSpPr>
-        <p:spPr>
-          <a:xfrm>
-            <a:off x="749808" y="3898963"/>
-            <a:ext cx="10692079" cy="940435"/>
-          </a:xfrm>
-          <a:prstGeom prst="rect">
-            <a:avLst/>
-          </a:prstGeom>
-          <a:solidFill>
-            <a:srgbClr val="0064B9"/>
-          </a:solidFill>
-          <a:ln>
-            <a:noFill/>
-          </a:ln>
-          <a:effectLst/>
-        </p:spPr>
-        <p:txBody>
-          <a:bodyPr rtlCol="0" anchor="ctr" wrap="none"/>
-          <a:lstStyle/>
-          <a:p>
-            <a:pPr algn="ctr"/>
-          </a:p>
-        </p:txBody>
-      </p:sp>
-      <p:sp>
-        <p:nvSpPr>
-          <p:cNvPr id="20" name="TextBox 19"/>
+                <a:latin typeface="IBM Plex Mono Medium"/>
+                <a:cs typeface="IBM Plex Mono Medium"/>
+                <a:ea typeface="IBM Plex Mono Medium"/>
+              </a:rPr>
+              <a:t>ЗАДАНИЙ УЧИТЕЛЯ</a:t>
+            </a:r>
+          </a:p>
+        </p:txBody>
+      </p:sp>
+      <p:sp>
+        <p:nvSpPr>
+          <p:cNvPr id="23" name="TextBox 22"/>
           <p:cNvSpPr txBox="1"/>
           <p:nvPr/>
         </p:nvSpPr>
         <p:spPr>
           <a:xfrm>
-            <a:off x="1024127" y="4098048"/>
-            <a:ext cx="10143439" cy="575468"/>
+            <a:off x="3407347" y="5105829"/>
+            <a:ext cx="2383219" cy="600892"/>
           </a:xfrm>
           <a:prstGeom prst="rect">
             <a:avLst/>
@@ -12286,51 +12333,33 @@
           <a:p>
             <a:pPr algn="l">
               <a:lnSpc>
-                <a:spcPts val="1812"/>
-              </a:lnSpc>
-            </a:pPr>
-            <a:r>
-              <a:rPr sz="1250">
-                <a:solidFill>
-                  <a:srgbClr val="FFFFFF"/>
-                </a:solidFill>
-                <a:latin typeface="GQ Text SemiBold"/>
-                <a:cs typeface="GQ Text SemiBold"/>
-                <a:ea typeface="GQ Text SemiBold"/>
-              </a:rPr>
-              <a:t>623 записи казахскими голосами, живые персонажи, крупные кнопки, разбор каждой ошибки и возврат на главный экран с</a:t>
-            </a:r>
-          </a:p>
-          <a:p>
-            <a:pPr algn="l">
-              <a:lnSpc>
-                <a:spcPts val="1812"/>
-              </a:lnSpc>
-            </a:pPr>
-            <a:r>
-              <a:rPr sz="1250">
-                <a:solidFill>
-                  <a:srgbClr val="FFFFFF"/>
-                </a:solidFill>
-                <a:latin typeface="GQ Text SemiBold"/>
-                <a:cs typeface="GQ Text SemiBold"/>
-                <a:ea typeface="GQ Text SemiBold"/>
-              </a:rPr>
-              <a:t>любого места.</a:t>
-            </a:r>
-          </a:p>
-        </p:txBody>
-      </p:sp>
-      <p:sp>
-        <p:nvSpPr>
-          <p:cNvPr id="21" name="TextBox 20"/>
+                <a:spcPts val="3332"/>
+              </a:lnSpc>
+            </a:pPr>
+            <a:r>
+              <a:rPr sz="3400" spc="-102">
+                <a:solidFill>
+                  <a:srgbClr val="EEEBE5"/>
+                </a:solidFill>
+                <a:latin typeface="GQ Text Bold"/>
+                <a:cs typeface="GQ Text Bold"/>
+                <a:ea typeface="GQ Text Bold"/>
+              </a:rPr>
+              <a:t>10</a:t>
+            </a:r>
+          </a:p>
+        </p:txBody>
+      </p:sp>
+      <p:sp>
+        <p:nvSpPr>
+          <p:cNvPr id="24" name="TextBox 23"/>
           <p:cNvSpPr txBox="1"/>
           <p:nvPr/>
         </p:nvSpPr>
         <p:spPr>
           <a:xfrm>
-            <a:off x="749808" y="5302044"/>
-            <a:ext cx="2383219" cy="600892"/>
+            <a:off x="3407347" y="5663755"/>
+            <a:ext cx="2383219" cy="216408"/>
           </a:xfrm>
           <a:prstGeom prst="rect">
             <a:avLst/>
@@ -12345,6 +12374,47 @@
           <a:p>
             <a:pPr algn="l">
               <a:lnSpc>
+                <a:spcPts val="1200"/>
+              </a:lnSpc>
+            </a:pPr>
+            <a:r>
+              <a:rPr sz="800" spc="64">
+                <a:solidFill>
+                  <a:srgbClr val="A6ADB6"/>
+                </a:solidFill>
+                <a:latin typeface="IBM Plex Mono Medium"/>
+                <a:cs typeface="IBM Plex Mono Medium"/>
+                <a:ea typeface="IBM Plex Mono Medium"/>
+              </a:rPr>
+              <a:t>ПО ЕЁ ОБРАЗЦУ</a:t>
+            </a:r>
+          </a:p>
+        </p:txBody>
+      </p:sp>
+      <p:sp>
+        <p:nvSpPr>
+          <p:cNvPr id="25" name="TextBox 24"/>
+          <p:cNvSpPr txBox="1"/>
+          <p:nvPr/>
+        </p:nvSpPr>
+        <p:spPr>
+          <a:xfrm>
+            <a:off x="6064886" y="5105829"/>
+            <a:ext cx="2383219" cy="600892"/>
+          </a:xfrm>
+          <a:prstGeom prst="rect">
+            <a:avLst/>
+          </a:prstGeom>
+          <a:noFill/>
+        </p:spPr>
+        <p:txBody>
+          <a:bodyPr wrap="none" lIns="0" rIns="0" tIns="0" bIns="0" anchor="t">
+            <a:spAutoFit/>
+          </a:bodyPr>
+          <a:lstStyle/>
+          <a:p>
+            <a:pPr algn="l">
+              <a:lnSpc>
                 <a:spcPts val="3332"/>
               </a:lnSpc>
             </a:pPr>
@@ -12357,20 +12427,20 @@
                 <a:cs typeface="GQ Text Bold"/>
                 <a:ea typeface="GQ Text Bold"/>
               </a:rPr>
-              <a:t>12</a:t>
-            </a:r>
-          </a:p>
-        </p:txBody>
-      </p:sp>
-      <p:sp>
-        <p:nvSpPr>
-          <p:cNvPr id="22" name="TextBox 21"/>
+              <a:t>9</a:t>
+            </a:r>
+          </a:p>
+        </p:txBody>
+      </p:sp>
+      <p:sp>
+        <p:nvSpPr>
+          <p:cNvPr id="26" name="TextBox 25"/>
           <p:cNvSpPr txBox="1"/>
           <p:nvPr/>
         </p:nvSpPr>
         <p:spPr>
           <a:xfrm>
-            <a:off x="749808" y="5859970"/>
+            <a:off x="6064886" y="5663755"/>
             <a:ext cx="2383219" cy="216408"/>
           </a:xfrm>
           <a:prstGeom prst="rect">
@@ -12398,171 +12468,7 @@
                 <a:cs typeface="IBM Plex Mono Medium"/>
                 <a:ea typeface="IBM Plex Mono Medium"/>
               </a:rPr>
-              <a:t>УРОКОВ · 5–7 КЛАСС</a:t>
-            </a:r>
-          </a:p>
-        </p:txBody>
-      </p:sp>
-      <p:sp>
-        <p:nvSpPr>
-          <p:cNvPr id="23" name="TextBox 22"/>
-          <p:cNvSpPr txBox="1"/>
-          <p:nvPr/>
-        </p:nvSpPr>
-        <p:spPr>
-          <a:xfrm>
-            <a:off x="3407347" y="5302044"/>
-            <a:ext cx="2383219" cy="600892"/>
-          </a:xfrm>
-          <a:prstGeom prst="rect">
-            <a:avLst/>
-          </a:prstGeom>
-          <a:noFill/>
-        </p:spPr>
-        <p:txBody>
-          <a:bodyPr wrap="none" lIns="0" rIns="0" tIns="0" bIns="0" anchor="t">
-            <a:spAutoFit/>
-          </a:bodyPr>
-          <a:lstStyle/>
-          <a:p>
-            <a:pPr algn="l">
-              <a:lnSpc>
-                <a:spcPts val="3332"/>
-              </a:lnSpc>
-            </a:pPr>
-            <a:r>
-              <a:rPr sz="3400" spc="-102">
-                <a:solidFill>
-                  <a:srgbClr val="EEEBE5"/>
-                </a:solidFill>
-                <a:latin typeface="GQ Text Bold"/>
-                <a:cs typeface="GQ Text Bold"/>
-                <a:ea typeface="GQ Text Bold"/>
-              </a:rPr>
-              <a:t>7</a:t>
-            </a:r>
-          </a:p>
-        </p:txBody>
-      </p:sp>
-      <p:sp>
-        <p:nvSpPr>
-          <p:cNvPr id="24" name="TextBox 23"/>
-          <p:cNvSpPr txBox="1"/>
-          <p:nvPr/>
-        </p:nvSpPr>
-        <p:spPr>
-          <a:xfrm>
-            <a:off x="3407347" y="5859970"/>
-            <a:ext cx="2383219" cy="216408"/>
-          </a:xfrm>
-          <a:prstGeom prst="rect">
-            <a:avLst/>
-          </a:prstGeom>
-          <a:noFill/>
-        </p:spPr>
-        <p:txBody>
-          <a:bodyPr wrap="none" lIns="0" rIns="0" tIns="0" bIns="0" anchor="t">
-            <a:spAutoFit/>
-          </a:bodyPr>
-          <a:lstStyle/>
-          <a:p>
-            <a:pPr algn="l">
-              <a:lnSpc>
-                <a:spcPts val="1200"/>
-              </a:lnSpc>
-            </a:pPr>
-            <a:r>
-              <a:rPr sz="800" spc="64">
-                <a:solidFill>
-                  <a:srgbClr val="A6ADB6"/>
-                </a:solidFill>
-                <a:latin typeface="IBM Plex Mono Medium"/>
-                <a:cs typeface="IBM Plex Mono Medium"/>
-                <a:ea typeface="IBM Plex Mono Medium"/>
-              </a:rPr>
-              <a:t>УРОКОВ · 7–9 КЛАСС</a:t>
-            </a:r>
-          </a:p>
-        </p:txBody>
-      </p:sp>
-      <p:sp>
-        <p:nvSpPr>
-          <p:cNvPr id="25" name="TextBox 24"/>
-          <p:cNvSpPr txBox="1"/>
-          <p:nvPr/>
-        </p:nvSpPr>
-        <p:spPr>
-          <a:xfrm>
-            <a:off x="6064886" y="5302044"/>
-            <a:ext cx="2383219" cy="600892"/>
-          </a:xfrm>
-          <a:prstGeom prst="rect">
-            <a:avLst/>
-          </a:prstGeom>
-          <a:noFill/>
-        </p:spPr>
-        <p:txBody>
-          <a:bodyPr wrap="none" lIns="0" rIns="0" tIns="0" bIns="0" anchor="t">
-            <a:spAutoFit/>
-          </a:bodyPr>
-          <a:lstStyle/>
-          <a:p>
-            <a:pPr algn="l">
-              <a:lnSpc>
-                <a:spcPts val="3332"/>
-              </a:lnSpc>
-            </a:pPr>
-            <a:r>
-              <a:rPr sz="3400" spc="-102">
-                <a:solidFill>
-                  <a:srgbClr val="EEEBE5"/>
-                </a:solidFill>
-                <a:latin typeface="GQ Text Bold"/>
-                <a:cs typeface="GQ Text Bold"/>
-                <a:ea typeface="GQ Text Bold"/>
-              </a:rPr>
-              <a:t>7</a:t>
-            </a:r>
-          </a:p>
-        </p:txBody>
-      </p:sp>
-      <p:sp>
-        <p:nvSpPr>
-          <p:cNvPr id="26" name="TextBox 25"/>
-          <p:cNvSpPr txBox="1"/>
-          <p:nvPr/>
-        </p:nvSpPr>
-        <p:spPr>
-          <a:xfrm>
-            <a:off x="6064886" y="5859970"/>
-            <a:ext cx="2383219" cy="216408"/>
-          </a:xfrm>
-          <a:prstGeom prst="rect">
-            <a:avLst/>
-          </a:prstGeom>
-          <a:noFill/>
-        </p:spPr>
-        <p:txBody>
-          <a:bodyPr wrap="none" lIns="0" rIns="0" tIns="0" bIns="0" anchor="t">
-            <a:spAutoFit/>
-          </a:bodyPr>
-          <a:lstStyle/>
-          <a:p>
-            <a:pPr algn="l">
-              <a:lnSpc>
-                <a:spcPts val="1200"/>
-              </a:lnSpc>
-            </a:pPr>
-            <a:r>
-              <a:rPr sz="800" spc="64">
-                <a:solidFill>
-                  <a:srgbClr val="A6ADB6"/>
-                </a:solidFill>
-                <a:latin typeface="IBM Plex Mono Medium"/>
-                <a:cs typeface="IBM Plex Mono Medium"/>
-                <a:ea typeface="IBM Plex Mono Medium"/>
-              </a:rPr>
-              <a:t>УРОКОВ · 9–11 КЛАСС</a:t>
+              <a:t>ИСПРАВЛЕНИЙ С ИСТОЧНИКОМ</a:t>
             </a:r>
           </a:p>
         </p:txBody>
@@ -13173,7 +13079,7 @@
                 <a:cs typeface="GQ Text"/>
                 <a:ea typeface="GQ Text"/>
               </a:rPr>
-              <a:t> Хранит код и всю историю изменений, там же собирается</a:t>
+              <a:t> Хранит код и всю историю изменений, там же собираются</a:t>
             </a:r>
           </a:p>
           <a:p>
@@ -13191,7 +13097,7 @@
                 <a:cs typeface="GQ Text"/>
                 <a:ea typeface="GQ Text"/>
               </a:rPr>
-              <a:t>версия для Android.</a:t>
+              <a:t>версии для Android и Windows.</a:t>
             </a:r>
           </a:p>
         </p:txBody>
@@ -13366,7 +13272,7 @@
                 <a:cs typeface="GQ Text SemiBold"/>
                 <a:ea typeface="GQ Text SemiBold"/>
               </a:rPr>
-              <a:t>Capacitor. </a:t>
+              <a:t>Capacitor и Electron. </a:t>
             </a:r>
             <a:r>
               <a:rPr sz="1150">
@@ -13377,7 +13283,7 @@
                 <a:cs typeface="GQ Text"/>
                 <a:ea typeface="GQ Text"/>
               </a:rPr>
-              <a:t> Превращает сайт в приложение, которое ставится на</a:t>
+              <a:t> Превращают сайт в приложение для телефона и</a:t>
             </a:r>
           </a:p>
           <a:p>
@@ -13395,7 +13301,7 @@
                 <a:cs typeface="GQ Text"/>
                 <a:ea typeface="GQ Text"/>
               </a:rPr>
-              <a:t>телефон.</a:t>
+              <a:t>для Windows.</a:t>
             </a:r>
           </a:p>
         </p:txBody>
@@ -13518,7 +13424,7 @@
                 <a:cs typeface="GQ Text"/>
                 <a:ea typeface="GQ Text"/>
               </a:rPr>
-              <a:t>70 автотестов при каждом изменении</a:t>
+              <a:t>7 автотестов при каждом изменении</a:t>
             </a:r>
           </a:p>
         </p:txBody>
@@ -13682,7 +13588,7 @@
                 <a:cs typeface="GQ Text"/>
                 <a:ea typeface="GQ Text"/>
               </a:rPr>
-              <a:t>Проверка формулировок заданий</a:t>
+              <a:t>Сверка текста учителя с её документом</a:t>
             </a:r>
           </a:p>
         </p:txBody>
@@ -14008,8 +13914,8 @@
         </p:nvSpPr>
         <p:spPr>
           <a:xfrm>
-            <a:off x="749808" y="801725"/>
-            <a:ext cx="10692079" cy="675373"/>
+            <a:off x="749808" y="804986"/>
+            <a:ext cx="10692079" cy="646428"/>
           </a:xfrm>
           <a:prstGeom prst="rect">
             <a:avLst/>
@@ -14024,11 +13930,11 @@
           <a:p>
             <a:pPr algn="l">
               <a:lnSpc>
-                <a:spcPts val="3745"/>
-              </a:lnSpc>
-            </a:pPr>
-            <a:r>
-              <a:rPr sz="3500" spc="-77">
+                <a:spcPts val="3584"/>
+              </a:lnSpc>
+            </a:pPr>
+            <a:r>
+              <a:rPr sz="3350" spc="-74">
                 <a:solidFill>
                   <a:srgbClr val="EEEBE5"/>
                 </a:solidFill>
@@ -14036,7 +13942,7 @@
                 <a:cs typeface="GQ Text Bold"/>
                 <a:ea typeface="GQ Text Bold"/>
               </a:rPr>
-              <a:t>Четыре вещи, которых нет в обычном тренажёре</a:t>
+              <a:t>Четыре вещи, которые делают приложение живым</a:t>
             </a:r>
           </a:p>
         </p:txBody>
@@ -14049,7 +13955,7 @@
         </p:nvSpPr>
         <p:spPr>
           <a:xfrm>
-            <a:off x="749808" y="1480520"/>
+            <a:off x="749808" y="1460136"/>
             <a:ext cx="8767504" cy="332907"/>
           </a:xfrm>
           <a:prstGeom prst="rect">
@@ -14077,7 +13983,7 @@
                 <a:cs typeface="GQ Text"/>
                 <a:ea typeface="GQ Text"/>
               </a:rPr>
-              <a:t>Каждая появилась не для красоты, а потому что без неё ученик переставал заниматься.</a:t>
+              <a:t>Каждая появилась не для красоты: так ученик не бросает тему на середине.</a:t>
             </a:r>
           </a:p>
         </p:txBody>
@@ -14090,8 +13996,8 @@
         </p:nvSpPr>
         <p:spPr>
           <a:xfrm>
-            <a:off x="749808" y="2227961"/>
-            <a:ext cx="2522143" cy="2521458"/>
+            <a:off x="749808" y="2207577"/>
+            <a:ext cx="2522143" cy="2165858"/>
           </a:xfrm>
           <a:prstGeom prst="rect">
             <a:avLst/>
@@ -14122,8 +14028,8 @@
         </p:nvSpPr>
         <p:spPr>
           <a:xfrm>
-            <a:off x="749808" y="2227961"/>
-            <a:ext cx="32004" cy="2521458"/>
+            <a:off x="749808" y="2207577"/>
+            <a:ext cx="32004" cy="2165858"/>
           </a:xfrm>
           <a:prstGeom prst="rect">
             <a:avLst/>
@@ -14152,7 +14058,7 @@
         </p:nvSpPr>
         <p:spPr>
           <a:xfrm>
-            <a:off x="1005840" y="2462656"/>
+            <a:off x="1005840" y="2442273"/>
             <a:ext cx="2010079" cy="189357"/>
           </a:xfrm>
           <a:prstGeom prst="rect">
@@ -14193,8 +14099,8 @@
         </p:nvSpPr>
         <p:spPr>
           <a:xfrm>
-            <a:off x="1005840" y="2701467"/>
-            <a:ext cx="2010079" cy="525551"/>
+            <a:off x="1005840" y="2681084"/>
+            <a:ext cx="2010079" cy="308381"/>
           </a:xfrm>
           <a:prstGeom prst="rect">
             <a:avLst/>
@@ -14221,25 +14127,7 @@
                 <a:cs typeface="GQ Text Bold"/>
                 <a:ea typeface="GQ Text Bold"/>
               </a:rPr>
-              <a:t>Принимает русские</a:t>
-            </a:r>
-          </a:p>
-          <a:p>
-            <a:pPr algn="l">
-              <a:lnSpc>
-                <a:spcPts val="1710"/>
-              </a:lnSpc>
-            </a:pPr>
-            <a:r>
-              <a:rPr sz="1500" spc="-22">
-                <a:solidFill>
-                  <a:srgbClr val="EEEBE5"/>
-                </a:solidFill>
-                <a:latin typeface="GQ Text Bold"/>
-                <a:cs typeface="GQ Text Bold"/>
-                <a:ea typeface="GQ Text Bold"/>
-              </a:rPr>
-              <a:t>буквы</a:t>
+              <a:t>Порядок учителя</a:t>
             </a:r>
           </a:p>
         </p:txBody>
@@ -14252,7 +14140,7 @@
         </p:nvSpPr>
         <p:spPr>
           <a:xfrm>
-            <a:off x="1005840" y="3297554"/>
+            <a:off x="1005840" y="3060001"/>
             <a:ext cx="204216" cy="252475"/>
           </a:xfrm>
           <a:prstGeom prst="rect">
@@ -14293,7 +14181,7 @@
         </p:nvSpPr>
         <p:spPr>
           <a:xfrm>
-            <a:off x="1210056" y="3297554"/>
+            <a:off x="1210056" y="3060001"/>
             <a:ext cx="1805863" cy="608076"/>
           </a:xfrm>
           <a:prstGeom prst="rect">
@@ -14321,7 +14209,7 @@
                 <a:cs typeface="GQ Text"/>
                 <a:ea typeface="GQ Text"/>
               </a:rPr>
-              <a:t>В казахском девять букв,</a:t>
+              <a:t>Диалог → правило →</a:t>
             </a:r>
           </a:p>
           <a:p>
@@ -14339,7 +14227,7 @@
                 <a:cs typeface="GQ Text"/>
                 <a:ea typeface="GQ Text"/>
               </a:rPr>
-              <a:t>которых нет на русской</a:t>
+              <a:t>задание, как в первой</a:t>
             </a:r>
           </a:p>
           <a:p>
@@ -14357,7 +14245,7 @@
                 <a:cs typeface="GQ Text"/>
                 <a:ea typeface="GQ Text"/>
               </a:rPr>
-              <a:t>раскладке</a:t>
+              <a:t>версии</a:t>
             </a:r>
           </a:p>
         </p:txBody>
@@ -14370,7 +14258,7 @@
         </p:nvSpPr>
         <p:spPr>
           <a:xfrm>
-            <a:off x="1005840" y="3931538"/>
+            <a:off x="1005840" y="3693985"/>
             <a:ext cx="204216" cy="252475"/>
           </a:xfrm>
           <a:prstGeom prst="rect">
@@ -14411,8 +14299,8 @@
         </p:nvSpPr>
         <p:spPr>
           <a:xfrm>
-            <a:off x="1210056" y="3931538"/>
-            <a:ext cx="1805863" cy="608076"/>
+            <a:off x="1210056" y="3693985"/>
+            <a:ext cx="1805863" cy="252475"/>
           </a:xfrm>
           <a:prstGeom prst="rect">
             <a:avLst/>
@@ -14439,43 +14327,7 @@
                 <a:cs typeface="GQ Text"/>
                 <a:ea typeface="GQ Text"/>
               </a:rPr>
-              <a:t>Ответ засчитывается,</a:t>
-            </a:r>
-          </a:p>
-          <a:p>
-            <a:pPr algn="l">
-              <a:lnSpc>
-                <a:spcPts val="1400"/>
-              </a:lnSpc>
-            </a:pPr>
-            <a:r>
-              <a:rPr sz="1000">
-                <a:solidFill>
-                  <a:srgbClr val="EEEBE5"/>
-                </a:solidFill>
-                <a:latin typeface="GQ Text"/>
-                <a:cs typeface="GQ Text"/>
-                <a:ea typeface="GQ Text"/>
-              </a:rPr>
-              <a:t>правильное написание</a:t>
-            </a:r>
-          </a:p>
-          <a:p>
-            <a:pPr algn="l">
-              <a:lnSpc>
-                <a:spcPts val="1400"/>
-              </a:lnSpc>
-            </a:pPr>
-            <a:r>
-              <a:rPr sz="1000">
-                <a:solidFill>
-                  <a:srgbClr val="EEEBE5"/>
-                </a:solidFill>
-                <a:latin typeface="GQ Text"/>
-                <a:cs typeface="GQ Text"/>
-                <a:ea typeface="GQ Text"/>
-              </a:rPr>
-              <a:t>показывается</a:t>
+              <a:t>Темы — с листка учителя</a:t>
             </a:r>
           </a:p>
         </p:txBody>
@@ -14488,8 +14340,8 @@
         </p:nvSpPr>
         <p:spPr>
           <a:xfrm>
-            <a:off x="3473119" y="2227961"/>
-            <a:ext cx="2522143" cy="2521458"/>
+            <a:off x="3473119" y="2207577"/>
+            <a:ext cx="2522143" cy="2165858"/>
           </a:xfrm>
           <a:prstGeom prst="rect">
             <a:avLst/>
@@ -14520,8 +14372,8 @@
         </p:nvSpPr>
         <p:spPr>
           <a:xfrm>
-            <a:off x="3473119" y="2227961"/>
-            <a:ext cx="32004" cy="2521458"/>
+            <a:off x="3473119" y="2207577"/>
+            <a:ext cx="32004" cy="2165858"/>
           </a:xfrm>
           <a:prstGeom prst="rect">
             <a:avLst/>
@@ -14550,7 +14402,7 @@
         </p:nvSpPr>
         <p:spPr>
           <a:xfrm>
-            <a:off x="3729151" y="2462656"/>
+            <a:off x="3729151" y="2442273"/>
             <a:ext cx="2010079" cy="189357"/>
           </a:xfrm>
           <a:prstGeom prst="rect">
@@ -14591,7 +14443,7 @@
         </p:nvSpPr>
         <p:spPr>
           <a:xfrm>
-            <a:off x="3729151" y="2701467"/>
+            <a:off x="3729151" y="2681084"/>
             <a:ext cx="2010079" cy="525551"/>
           </a:xfrm>
           <a:prstGeom prst="rect">
@@ -14619,7 +14471,7 @@
                 <a:cs typeface="GQ Text Bold"/>
                 <a:ea typeface="GQ Text Bold"/>
               </a:rPr>
-              <a:t>Считает окончания</a:t>
+              <a:t>Говорящие</a:t>
             </a:r>
           </a:p>
           <a:p>
@@ -14637,7 +14489,7 @@
                 <a:cs typeface="GQ Text Bold"/>
                 <a:ea typeface="GQ Text Bold"/>
               </a:rPr>
-              <a:t>по правилам</a:t>
+              <a:t>персонажи</a:t>
             </a:r>
           </a:p>
         </p:txBody>
@@ -14650,7 +14502,7 @@
         </p:nvSpPr>
         <p:spPr>
           <a:xfrm>
-            <a:off x="3729151" y="3297554"/>
+            <a:off x="3729151" y="3277171"/>
             <a:ext cx="204216" cy="252475"/>
           </a:xfrm>
           <a:prstGeom prst="rect">
@@ -14691,7 +14543,7 @@
         </p:nvSpPr>
         <p:spPr>
           <a:xfrm>
-            <a:off x="3933367" y="3297554"/>
+            <a:off x="3933367" y="3277171"/>
             <a:ext cx="1805863" cy="430276"/>
           </a:xfrm>
           <a:prstGeom prst="rect">
@@ -14719,7 +14571,7 @@
                 <a:cs typeface="GQ Text"/>
                 <a:ea typeface="GQ Text"/>
               </a:rPr>
-              <a:t>Подставь любое своё слово</a:t>
+              <a:t>Айша и учитель произносят</a:t>
             </a:r>
           </a:p>
           <a:p>
@@ -14737,7 +14589,7 @@
                 <a:cs typeface="GQ Text"/>
                 <a:ea typeface="GQ Text"/>
               </a:rPr>
-              <a:t>и увидишь все его формы</a:t>
+              <a:t>каждую реплику</a:t>
             </a:r>
           </a:p>
         </p:txBody>
@@ -14750,7 +14602,7 @@
         </p:nvSpPr>
         <p:spPr>
           <a:xfrm>
-            <a:off x="3729151" y="3753739"/>
+            <a:off x="3729151" y="3733355"/>
             <a:ext cx="204216" cy="252475"/>
           </a:xfrm>
           <a:prstGeom prst="rect">
@@ -14791,7 +14643,7 @@
         </p:nvSpPr>
         <p:spPr>
           <a:xfrm>
-            <a:off x="3933367" y="3753739"/>
+            <a:off x="3933367" y="3733355"/>
             <a:ext cx="1805863" cy="430276"/>
           </a:xfrm>
           <a:prstGeom prst="rect">
@@ -14819,7 +14671,7 @@
                 <a:cs typeface="GQ Text"/>
                 <a:ea typeface="GQ Text"/>
               </a:rPr>
-              <a:t>Не таблица, а правила</a:t>
+              <a:t>Персонаж двигается, пока</a:t>
             </a:r>
           </a:p>
           <a:p>
@@ -14837,7 +14689,7 @@
                 <a:cs typeface="GQ Text"/>
                 <a:ea typeface="GQ Text"/>
               </a:rPr>
-              <a:t>казахского языка</a:t>
+              <a:t>звучит его голос</a:t>
             </a:r>
           </a:p>
         </p:txBody>
@@ -14850,8 +14702,8 @@
         </p:nvSpPr>
         <p:spPr>
           <a:xfrm>
-            <a:off x="6196431" y="2227961"/>
-            <a:ext cx="2522143" cy="2521458"/>
+            <a:off x="6196431" y="2207577"/>
+            <a:ext cx="2522143" cy="2165858"/>
           </a:xfrm>
           <a:prstGeom prst="rect">
             <a:avLst/>
@@ -14882,8 +14734,8 @@
         </p:nvSpPr>
         <p:spPr>
           <a:xfrm>
-            <a:off x="6196431" y="2227961"/>
-            <a:ext cx="32004" cy="2521458"/>
+            <a:off x="6196431" y="2207577"/>
+            <a:ext cx="32004" cy="2165858"/>
           </a:xfrm>
           <a:prstGeom prst="rect">
             <a:avLst/>
@@ -14912,7 +14764,7 @@
         </p:nvSpPr>
         <p:spPr>
           <a:xfrm>
-            <a:off x="6452463" y="2462656"/>
+            <a:off x="6452463" y="2442273"/>
             <a:ext cx="2010079" cy="189357"/>
           </a:xfrm>
           <a:prstGeom prst="rect">
@@ -14953,8 +14805,8 @@
         </p:nvSpPr>
         <p:spPr>
           <a:xfrm>
-            <a:off x="6452463" y="2701467"/>
-            <a:ext cx="2010079" cy="308381"/>
+            <a:off x="6452463" y="2681084"/>
+            <a:ext cx="2010079" cy="525551"/>
           </a:xfrm>
           <a:prstGeom prst="rect">
             <a:avLst/>
@@ -14981,7 +14833,25 @@
                 <a:cs typeface="GQ Text Bold"/>
                 <a:ea typeface="GQ Text Bold"/>
               </a:rPr>
-              <a:t>Возвращает забытое</a:t>
+              <a:t>Проверка без</a:t>
+            </a:r>
+          </a:p>
+          <a:p>
+            <a:pPr algn="l">
+              <a:lnSpc>
+                <a:spcPts val="1710"/>
+              </a:lnSpc>
+            </a:pPr>
+            <a:r>
+              <a:rPr sz="1500" spc="-22">
+                <a:solidFill>
+                  <a:srgbClr val="EEEBE5"/>
+                </a:solidFill>
+                <a:latin typeface="GQ Text Bold"/>
+                <a:cs typeface="GQ Text Bold"/>
+                <a:ea typeface="GQ Text Bold"/>
+              </a:rPr>
+              <a:t>поблажек</a:t>
             </a:r>
           </a:p>
         </p:txBody>
@@ -14994,7 +14864,7 @@
         </p:nvSpPr>
         <p:spPr>
           <a:xfrm>
-            <a:off x="6452463" y="3080384"/>
+            <a:off x="6452463" y="3277171"/>
             <a:ext cx="204216" cy="252475"/>
           </a:xfrm>
           <a:prstGeom prst="rect">
@@ -15035,8 +14905,8 @@
         </p:nvSpPr>
         <p:spPr>
           <a:xfrm>
-            <a:off x="6656679" y="3080384"/>
-            <a:ext cx="1805863" cy="430276"/>
+            <a:off x="6656679" y="3277171"/>
+            <a:ext cx="1805863" cy="252475"/>
           </a:xfrm>
           <a:prstGeom prst="rect">
             <a:avLst/>
@@ -15063,9 +14933,73 @@
                 <a:cs typeface="GQ Text"/>
                 <a:ea typeface="GQ Text"/>
               </a:rPr>
-              <a:t>Ошибся — задание вернётся</a:t>
-            </a:r>
-          </a:p>
+              <a:t>Ответ проверяется сразу</a:t>
+            </a:r>
+          </a:p>
+        </p:txBody>
+      </p:sp>
+      <p:sp>
+        <p:nvSpPr>
+          <p:cNvPr id="30" name="TextBox 29"/>
+          <p:cNvSpPr txBox="1"/>
+          <p:nvPr/>
+        </p:nvSpPr>
+        <p:spPr>
+          <a:xfrm>
+            <a:off x="6452463" y="3555555"/>
+            <a:ext cx="204216" cy="252475"/>
+          </a:xfrm>
+          <a:prstGeom prst="rect">
+            <a:avLst/>
+          </a:prstGeom>
+          <a:noFill/>
+        </p:spPr>
+        <p:txBody>
+          <a:bodyPr wrap="none" lIns="0" rIns="0" tIns="0" bIns="0" anchor="t">
+            <a:spAutoFit/>
+          </a:bodyPr>
+          <a:lstStyle/>
+          <a:p>
+            <a:pPr algn="l">
+              <a:lnSpc>
+                <a:spcPts val="1400"/>
+              </a:lnSpc>
+            </a:pPr>
+            <a:r>
+              <a:rPr sz="1000">
+                <a:solidFill>
+                  <a:srgbClr val="59AAF8"/>
+                </a:solidFill>
+                <a:latin typeface="IBM Plex Mono Medium"/>
+                <a:cs typeface="IBM Plex Mono Medium"/>
+                <a:ea typeface="IBM Plex Mono Medium"/>
+              </a:rPr>
+              <a:t>—</a:t>
+            </a:r>
+          </a:p>
+        </p:txBody>
+      </p:sp>
+      <p:sp>
+        <p:nvSpPr>
+          <p:cNvPr id="31" name="TextBox 30"/>
+          <p:cNvSpPr txBox="1"/>
+          <p:nvPr/>
+        </p:nvSpPr>
+        <p:spPr>
+          <a:xfrm>
+            <a:off x="6656679" y="3555555"/>
+            <a:ext cx="1805863" cy="430276"/>
+          </a:xfrm>
+          <a:prstGeom prst="rect">
+            <a:avLst/>
+          </a:prstGeom>
+          <a:noFill/>
+        </p:spPr>
+        <p:txBody>
+          <a:bodyPr wrap="none" lIns="0" rIns="0" tIns="0" bIns="0" anchor="t">
+            <a:spAutoFit/>
+          </a:bodyPr>
+          <a:lstStyle/>
           <a:p>
             <a:pPr algn="l">
               <a:lnSpc>
@@ -15081,73 +15015,9 @@
                 <a:cs typeface="GQ Text"/>
                 <a:ea typeface="GQ Text"/>
               </a:rPr>
-              <a:t>сегодня</a:t>
-            </a:r>
-          </a:p>
-        </p:txBody>
-      </p:sp>
-      <p:sp>
-        <p:nvSpPr>
-          <p:cNvPr id="30" name="TextBox 29"/>
-          <p:cNvSpPr txBox="1"/>
-          <p:nvPr/>
-        </p:nvSpPr>
-        <p:spPr>
-          <a:xfrm>
-            <a:off x="6452463" y="3536568"/>
-            <a:ext cx="204216" cy="252475"/>
-          </a:xfrm>
-          <a:prstGeom prst="rect">
-            <a:avLst/>
-          </a:prstGeom>
-          <a:noFill/>
-        </p:spPr>
-        <p:txBody>
-          <a:bodyPr wrap="none" lIns="0" rIns="0" tIns="0" bIns="0" anchor="t">
-            <a:spAutoFit/>
-          </a:bodyPr>
-          <a:lstStyle/>
-          <a:p>
-            <a:pPr algn="l">
-              <a:lnSpc>
-                <a:spcPts val="1400"/>
-              </a:lnSpc>
-            </a:pPr>
-            <a:r>
-              <a:rPr sz="1000">
-                <a:solidFill>
-                  <a:srgbClr val="59AAF8"/>
-                </a:solidFill>
-                <a:latin typeface="IBM Plex Mono Medium"/>
-                <a:cs typeface="IBM Plex Mono Medium"/>
-                <a:ea typeface="IBM Plex Mono Medium"/>
-              </a:rPr>
-              <a:t>—</a:t>
-            </a:r>
-          </a:p>
-        </p:txBody>
-      </p:sp>
-      <p:sp>
-        <p:nvSpPr>
-          <p:cNvPr id="31" name="TextBox 30"/>
-          <p:cNvSpPr txBox="1"/>
-          <p:nvPr/>
-        </p:nvSpPr>
-        <p:spPr>
-          <a:xfrm>
-            <a:off x="6656679" y="3536568"/>
-            <a:ext cx="1805863" cy="430276"/>
-          </a:xfrm>
-          <a:prstGeom prst="rect">
-            <a:avLst/>
-          </a:prstGeom>
-          <a:noFill/>
-        </p:spPr>
-        <p:txBody>
-          <a:bodyPr wrap="none" lIns="0" rIns="0" tIns="0" bIns="0" anchor="t">
-            <a:spAutoFit/>
-          </a:bodyPr>
-          <a:lstStyle/>
+              <a:t>«Отметить всё подряд» не</a:t>
+            </a:r>
+          </a:p>
           <a:p>
             <a:pPr algn="l">
               <a:lnSpc>
@@ -15163,25 +15033,7 @@
                 <a:cs typeface="GQ Text"/>
                 <a:ea typeface="GQ Text"/>
               </a:rPr>
-              <a:t>Ответил верно — через день,</a:t>
-            </a:r>
-          </a:p>
-          <a:p>
-            <a:pPr algn="l">
-              <a:lnSpc>
-                <a:spcPts val="1400"/>
-              </a:lnSpc>
-            </a:pPr>
-            <a:r>
-              <a:rPr sz="1000">
-                <a:solidFill>
-                  <a:srgbClr val="EEEBE5"/>
-                </a:solidFill>
-                <a:latin typeface="GQ Text"/>
-                <a:cs typeface="GQ Text"/>
-                <a:ea typeface="GQ Text"/>
-              </a:rPr>
-              <a:t>потом через три</a:t>
+              <a:t>засчитывается</a:t>
             </a:r>
           </a:p>
         </p:txBody>
@@ -15194,8 +15046,8 @@
         </p:nvSpPr>
         <p:spPr>
           <a:xfrm>
-            <a:off x="8919743" y="2227961"/>
-            <a:ext cx="2522143" cy="2521458"/>
+            <a:off x="8919743" y="2207577"/>
+            <a:ext cx="2522143" cy="2165858"/>
           </a:xfrm>
           <a:prstGeom prst="rect">
             <a:avLst/>
@@ -15226,8 +15078,8 @@
         </p:nvSpPr>
         <p:spPr>
           <a:xfrm>
-            <a:off x="8919743" y="2227961"/>
-            <a:ext cx="32004" cy="2521458"/>
+            <a:off x="8919743" y="2207577"/>
+            <a:ext cx="32004" cy="2165858"/>
           </a:xfrm>
           <a:prstGeom prst="rect">
             <a:avLst/>
@@ -15256,7 +15108,7 @@
         </p:nvSpPr>
         <p:spPr>
           <a:xfrm>
-            <a:off x="9175775" y="2462656"/>
+            <a:off x="9175775" y="2442273"/>
             <a:ext cx="2010079" cy="189357"/>
           </a:xfrm>
           <a:prstGeom prst="rect">
@@ -15297,7 +15149,7 @@
         </p:nvSpPr>
         <p:spPr>
           <a:xfrm>
-            <a:off x="9175775" y="2701467"/>
+            <a:off x="9175775" y="2681084"/>
             <a:ext cx="2010079" cy="308381"/>
           </a:xfrm>
           <a:prstGeom prst="rect">
@@ -15325,7 +15177,7 @@
                 <a:cs typeface="GQ Text Bold"/>
                 <a:ea typeface="GQ Text Bold"/>
               </a:rPr>
-              <a:t>Говорит и слушает</a:t>
+              <a:t>Текст сверен</a:t>
             </a:r>
           </a:p>
         </p:txBody>
@@ -15338,7 +15190,7 @@
         </p:nvSpPr>
         <p:spPr>
           <a:xfrm>
-            <a:off x="9175775" y="3080384"/>
+            <a:off x="9175775" y="3060001"/>
             <a:ext cx="204216" cy="252475"/>
           </a:xfrm>
           <a:prstGeom prst="rect">
@@ -15379,7 +15231,7 @@
         </p:nvSpPr>
         <p:spPr>
           <a:xfrm>
-            <a:off x="9379991" y="3080384"/>
+            <a:off x="9379991" y="3060001"/>
             <a:ext cx="1805863" cy="430276"/>
           </a:xfrm>
           <a:prstGeom prst="rect">
@@ -15407,7 +15259,7 @@
                 <a:cs typeface="GQ Text"/>
                 <a:ea typeface="GQ Text"/>
               </a:rPr>
-              <a:t>623 записи казахскими</a:t>
+              <a:t>Правила сверены с</a:t>
             </a:r>
           </a:p>
           <a:p>
@@ -15425,7 +15277,7 @@
                 <a:cs typeface="GQ Text"/>
                 <a:ea typeface="GQ Text"/>
               </a:rPr>
-              <a:t>голосами</a:t>
+              <a:t>учебником «Бәйшешек»</a:t>
             </a:r>
           </a:p>
         </p:txBody>
@@ -15438,7 +15290,7 @@
         </p:nvSpPr>
         <p:spPr>
           <a:xfrm>
-            <a:off x="9175775" y="3536568"/>
+            <a:off x="9175775" y="3516185"/>
             <a:ext cx="204216" cy="252475"/>
           </a:xfrm>
           <a:prstGeom prst="rect">
@@ -15479,7 +15331,7 @@
         </p:nvSpPr>
         <p:spPr>
           <a:xfrm>
-            <a:off x="9379991" y="3536568"/>
+            <a:off x="9379991" y="3516185"/>
             <a:ext cx="1805863" cy="430276"/>
           </a:xfrm>
           <a:prstGeom prst="rect">
@@ -15507,7 +15359,7 @@
                 <a:cs typeface="GQ Text"/>
                 <a:ea typeface="GQ Text"/>
               </a:rPr>
-              <a:t>Персонаж двигается, пока</a:t>
+              <a:t>Каждое исправление — с</a:t>
             </a:r>
           </a:p>
           <a:p>
@@ -15525,7 +15377,7 @@
                 <a:cs typeface="GQ Text"/>
                 <a:ea typeface="GQ Text"/>
               </a:rPr>
-              <a:t>звучит его реплика</a:t>
+              <a:t>источником</a:t>
             </a:r>
           </a:p>
         </p:txBody>
@@ -15538,7 +15390,7 @@
         </p:nvSpPr>
         <p:spPr>
           <a:xfrm>
-            <a:off x="749808" y="5151755"/>
+            <a:off x="749808" y="4775771"/>
             <a:ext cx="10692079" cy="710247"/>
           </a:xfrm>
           <a:prstGeom prst="rect">
@@ -15568,7 +15420,7 @@
         </p:nvSpPr>
         <p:spPr>
           <a:xfrm>
-            <a:off x="1024127" y="5350840"/>
+            <a:off x="1024127" y="4974856"/>
             <a:ext cx="10143439" cy="345281"/>
           </a:xfrm>
           <a:prstGeom prst="rect">
@@ -15596,7 +15448,7 @@
                 <a:cs typeface="GQ Text SemiBold"/>
                 <a:ea typeface="GQ Text SemiBold"/>
               </a:rPr>
-              <a:t>И всё это работает без интернета: после первой загрузки приложение не отправляет в сеть ни одного запроса.</a:t>
+              <a:t>И всё это работает без интернета: после первой загрузки приложение вместе с озвучкой хранится на устройстве.</a:t>
             </a:r>
           </a:p>
         </p:txBody>
@@ -16158,7 +16010,7 @@
                 <a:cs typeface="GQ Text Bold"/>
                 <a:ea typeface="GQ Text Bold"/>
               </a:rPr>
-              <a:t>210</a:t>
+              <a:t>97</a:t>
             </a:r>
           </a:p>
         </p:txBody>
@@ -16404,7 +16256,7 @@
                 <a:cs typeface="GQ Text"/>
                 <a:ea typeface="GQ Text"/>
               </a:rPr>
-              <a:t>Приложение целиком, вместе со шрифтом и изображениями, занимает около 1,4 МБ. Скачивается один раз и дальше работает без интернета — проверено замером.</a:t>
+              <a:t>Приложение целиком, вместе с озвучкой, шрифтом и изображениями, занимает около 1,5 МБ. Скачивается один раз и дальше работает без интернета — проверено замером.</a:t>
             </a:r>
           </a:p>
         </p:txBody>
@@ -16465,7 +16317,7 @@
         </p:nvSpPr>
         <p:spPr>
           <a:xfrm>
-            <a:off x="7104202" y="3251707"/>
+            <a:off x="7104202" y="3472687"/>
             <a:ext cx="4337684" cy="2639059"/>
           </a:xfrm>
           <a:prstGeom prst="rect">
@@ -16497,8 +16349,8 @@
         </p:nvSpPr>
         <p:spPr>
           <a:xfrm>
-            <a:off x="749808" y="3251707"/>
-            <a:ext cx="6153226" cy="2122932"/>
+            <a:off x="749808" y="3472687"/>
+            <a:ext cx="6153226" cy="2122931"/>
           </a:xfrm>
           <a:prstGeom prst="rect">
             <a:avLst/>
@@ -16699,7 +16551,7 @@
         <p:spPr>
           <a:xfrm>
             <a:off x="749808" y="2203195"/>
-            <a:ext cx="10692079" cy="701040"/>
+            <a:ext cx="10692079" cy="922020"/>
           </a:xfrm>
           <a:prstGeom prst="rect">
             <a:avLst/>
@@ -16729,7 +16581,7 @@
         <p:spPr>
           <a:xfrm>
             <a:off x="1024127" y="2403754"/>
-            <a:ext cx="10143439" cy="331470"/>
+            <a:ext cx="10143439" cy="552450"/>
           </a:xfrm>
           <a:prstGeom prst="rect">
             <a:avLst/>
@@ -16756,7 +16608,25 @@
                 <a:cs typeface="GQ Text SemiBold"/>
                 <a:ea typeface="GQ Text SemiBold"/>
               </a:rPr>
-              <a:t>Уже сделано: 26 уроков и 623 записи озвучки · работает без интернета — на телефоне и на компьютере · сайт открыт для всех</a:t>
+              <a:t>Уже сделано: 7 тем и 15 заданий по заданию учителя · 47 записей озвучки · работает без интернета — на телефоне и на компьютере</a:t>
+            </a:r>
+          </a:p>
+          <a:p>
+            <a:pPr algn="l">
+              <a:lnSpc>
+                <a:spcPts val="1740"/>
+              </a:lnSpc>
+            </a:pPr>
+            <a:r>
+              <a:rPr sz="1200">
+                <a:solidFill>
+                  <a:srgbClr val="FFFFFF"/>
+                </a:solidFill>
+                <a:latin typeface="GQ Text SemiBold"/>
+                <a:cs typeface="GQ Text SemiBold"/>
+                <a:ea typeface="GQ Text SemiBold"/>
+              </a:rPr>
+              <a:t>· сайт открыт для всех</a:t>
             </a:r>
           </a:p>
         </p:txBody>
@@ -16769,7 +16639,7 @@
         </p:nvSpPr>
         <p:spPr>
           <a:xfrm>
-            <a:off x="1024127" y="3503675"/>
+            <a:off x="1024127" y="3724655"/>
             <a:ext cx="5604586" cy="198374"/>
           </a:xfrm>
           <a:prstGeom prst="rect">
@@ -16810,7 +16680,7 @@
         </p:nvSpPr>
         <p:spPr>
           <a:xfrm>
-            <a:off x="1024127" y="3779519"/>
+            <a:off x="1024127" y="4000499"/>
             <a:ext cx="5604586" cy="1403350"/>
           </a:xfrm>
           <a:prstGeom prst="rect">
@@ -16874,7 +16744,7 @@
                 <a:cs typeface="GQ Text Bold"/>
                 <a:ea typeface="GQ Text Bold"/>
               </a:rPr>
-              <a:t>довести курс до школьной программы.</a:t>
+              <a:t>добавить темы по школьной программе.</a:t>
             </a:r>
           </a:p>
           <a:p>
@@ -16905,7 +16775,7 @@
         </p:nvSpPr>
         <p:spPr>
           <a:xfrm>
-            <a:off x="7378522" y="3503675"/>
+            <a:off x="7378522" y="3724655"/>
             <a:ext cx="3789045" cy="198374"/>
           </a:xfrm>
           <a:prstGeom prst="rect">
@@ -16946,7 +16816,7 @@
         </p:nvSpPr>
         <p:spPr>
           <a:xfrm>
-            <a:off x="7378522" y="3817315"/>
+            <a:off x="7378522" y="4038295"/>
             <a:ext cx="210566" cy="277723"/>
           </a:xfrm>
           <a:prstGeom prst="rect">
@@ -16987,7 +16857,7 @@
         </p:nvSpPr>
         <p:spPr>
           <a:xfrm>
-            <a:off x="7589088" y="3817315"/>
+            <a:off x="7589088" y="4038295"/>
             <a:ext cx="3578479" cy="277723"/>
           </a:xfrm>
           <a:prstGeom prst="rect">
@@ -17015,7 +16885,7 @@
                 <a:cs typeface="GQ Text"/>
                 <a:ea typeface="GQ Text"/>
               </a:rPr>
-              <a:t>Полный курс с 5 по 11 класс</a:t>
+              <a:t>Страница, где учитель сам добавляет задания</a:t>
             </a:r>
           </a:p>
         </p:txBody>
@@ -17028,7 +16898,7 @@
         </p:nvSpPr>
         <p:spPr>
           <a:xfrm>
-            <a:off x="7378522" y="4131767"/>
+            <a:off x="7378522" y="4352747"/>
             <a:ext cx="210566" cy="277723"/>
           </a:xfrm>
           <a:prstGeom prst="rect">
@@ -17069,7 +16939,7 @@
         </p:nvSpPr>
         <p:spPr>
           <a:xfrm>
-            <a:off x="7589088" y="4131767"/>
+            <a:off x="7589088" y="4352747"/>
             <a:ext cx="3578479" cy="277723"/>
           </a:xfrm>
           <a:prstGeom prst="rect">
@@ -17097,7 +16967,7 @@
                 <a:cs typeface="GQ Text"/>
                 <a:ea typeface="GQ Text"/>
               </a:rPr>
-              <a:t>Запись живым голосом носителя языка</a:t>
+              <a:t>Новые темы: глагол, местоимение, наречие</a:t>
             </a:r>
           </a:p>
         </p:txBody>
@@ -17110,7 +16980,7 @@
         </p:nvSpPr>
         <p:spPr>
           <a:xfrm>
-            <a:off x="7378522" y="4446219"/>
+            <a:off x="7378522" y="4667199"/>
             <a:ext cx="210566" cy="277723"/>
           </a:xfrm>
           <a:prstGeom prst="rect">
@@ -17151,7 +17021,7 @@
         </p:nvSpPr>
         <p:spPr>
           <a:xfrm>
-            <a:off x="7589088" y="4446219"/>
+            <a:off x="7589088" y="4667199"/>
             <a:ext cx="3578479" cy="277723"/>
           </a:xfrm>
           <a:prstGeom prst="rect">
@@ -17179,7 +17049,7 @@
                 <a:cs typeface="GQ Text"/>
                 <a:ea typeface="GQ Text"/>
               </a:rPr>
-              <a:t>Кабинет учителя: класс, задания, успеваемость</a:t>
+              <a:t>Запись живым голосом носителя языка</a:t>
             </a:r>
           </a:p>
         </p:txBody>
@@ -17192,7 +17062,7 @@
         </p:nvSpPr>
         <p:spPr>
           <a:xfrm>
-            <a:off x="7378522" y="4760671"/>
+            <a:off x="7378522" y="4981651"/>
             <a:ext cx="210566" cy="277723"/>
           </a:xfrm>
           <a:prstGeom prst="rect">
@@ -17233,7 +17103,7 @@
         </p:nvSpPr>
         <p:spPr>
           <a:xfrm>
-            <a:off x="7589088" y="4760671"/>
+            <a:off x="7589088" y="4981651"/>
             <a:ext cx="3578479" cy="277723"/>
           </a:xfrm>
           <a:prstGeom prst="rect">
@@ -17261,7 +17131,7 @@
                 <a:cs typeface="GQ Text"/>
                 <a:ea typeface="GQ Text"/>
               </a:rPr>
-              <a:t>Версия для казахских школ, изучающих русский</a:t>
+              <a:t>Кабинет учителя: класс, задания, успеваемость</a:t>
             </a:r>
           </a:p>
         </p:txBody>
@@ -17274,7 +17144,7 @@
         </p:nvSpPr>
         <p:spPr>
           <a:xfrm>
-            <a:off x="7378522" y="5075123"/>
+            <a:off x="7378522" y="5296103"/>
             <a:ext cx="210566" cy="277723"/>
           </a:xfrm>
           <a:prstGeom prst="rect">
@@ -17315,7 +17185,7 @@
         </p:nvSpPr>
         <p:spPr>
           <a:xfrm>
-            <a:off x="7589088" y="5075123"/>
+            <a:off x="7589088" y="5296103"/>
             <a:ext cx="3578479" cy="277723"/>
           </a:xfrm>
           <a:prstGeom prst="rect">
@@ -17356,7 +17226,7 @@
         </p:nvSpPr>
         <p:spPr>
           <a:xfrm>
-            <a:off x="7378522" y="5389575"/>
+            <a:off x="7378522" y="5610555"/>
             <a:ext cx="210566" cy="277723"/>
           </a:xfrm>
           <a:prstGeom prst="rect">
@@ -17397,7 +17267,7 @@
         </p:nvSpPr>
         <p:spPr>
           <a:xfrm>
-            <a:off x="7589088" y="5389575"/>
+            <a:off x="7589088" y="5610555"/>
             <a:ext cx="3578479" cy="277723"/>
           </a:xfrm>
           <a:prstGeom prst="rect">
